--- a/Quorum-pitch.pptx
+++ b/Quorum-pitch.pptx
@@ -4,16 +4,20 @@
   <p:sldMasterIdLst>
     <p:sldMasterId id="2147483648" r:id="rId1"/>
   </p:sldMasterIdLst>
+  <p:notesMasterIdLst>
+    <p:notesMasterId r:id="rId11"/>
+  </p:notesMasterIdLst>
   <p:sldIdLst>
     <p:sldId id="256" r:id="rId2"/>
     <p:sldId id="257" r:id="rId3"/>
     <p:sldId id="258" r:id="rId4"/>
     <p:sldId id="259" r:id="rId5"/>
     <p:sldId id="260" r:id="rId6"/>
+    <p:sldId id="261" r:id="rId7"/>
+    <p:sldId id="262" r:id="rId8"/>
+    <p:sldId id="263" r:id="rId9"/>
+    <p:sldId id="264" r:id="rId10"/>
   </p:sldIdLst>
-  <p:notesMasterIdLst>
-    <p:notesMasterId r:id="rId7"/>
-  </p:notesMasterIdLst>
   <p:sldSz cx="12192000" cy="6858000"/>
   <p:notesSz cx="6858000" cy="12192000"/>
   <p:defaultTextStyle>
@@ -108,6 +112,11 @@
       </a:defRPr>
     </a:lvl9pPr>
   </p:defaultTextStyle>
+  <p:extLst>
+    <p:ext uri="{EFAFB233-063F-42B5-8137-9DF3F51BA10A}">
+      <p15:sldGuideLst xmlns:p15="http://schemas.microsoft.com/office/powerpoint/2012/main"/>
+    </p:ext>
+  </p:extLst>
 </p:presentation>
 </file>
 
@@ -133,234 +142,10 @@
           <a:chExt cx="0" cy="0"/>
         </a:xfrm>
       </p:grpSpPr>
-      <p:sp>
-        <p:nvSpPr>
-          <p:cNvPr id="2" name="Header Placeholder 1"/>
-          <p:cNvSpPr>
-            <a:spLocks noGrp="1"/>
-          </p:cNvSpPr>
-          <p:nvPr>
-            <p:ph type="hdr" sz="quarter"/>
-          </p:nvPr>
-        </p:nvSpPr>
-        <p:spPr>
-          <a:xfrm>
-            <a:off x="0" y="0"/>
-            <a:ext cx="2971800" cy="458788"/>
-          </a:xfrm>
-          <a:prstGeom prst="rect">
-            <a:avLst/>
-          </a:prstGeom>
-        </p:spPr>
-        <p:txBody>
-          <a:bodyPr vert="horz" lIns="91440" tIns="45720" rIns="91440" bIns="45720" rtlCol="0"/>
-          <a:lstStyle>
-            <a:lvl1pPr algn="l">
-              <a:defRPr sz="1200"/>
-            </a:lvl1pPr>
-          </a:lstStyle>
-          <a:p>
-            <a:endParaRPr lang="en-US"/>
-          </a:p>
-        </p:txBody>
-      </p:sp>
-      <p:sp>
-        <p:nvSpPr>
-          <p:cNvPr id="3" name="Date Placeholder 2"/>
-          <p:cNvSpPr>
-            <a:spLocks noGrp="1"/>
-          </p:cNvSpPr>
-          <p:nvPr>
-            <p:ph type="dt" idx="1"/>
-          </p:nvPr>
-        </p:nvSpPr>
-        <p:spPr>
-          <a:xfrm>
-            <a:off x="3884613" y="0"/>
-            <a:ext cx="2971800" cy="458788"/>
-          </a:xfrm>
-          <a:prstGeom prst="rect">
-            <a:avLst/>
-          </a:prstGeom>
-        </p:spPr>
-        <p:txBody>
-          <a:bodyPr vert="horz" lIns="91440" tIns="45720" rIns="91440" bIns="45720" rtlCol="0"/>
-          <a:lstStyle>
-            <a:lvl1pPr algn="r">
-              <a:defRPr sz="1200"/>
-            </a:lvl1pPr>
-          </a:lstStyle>
-          <a:p>
-            <a:fld id="{5282F153-3F37-0F45-9E97-73ACFA13230C}" type="datetimeFigureOut">
-              <a:rPr lang="en-US"/>
-              <a:t>7/23/19</a:t>
-            </a:fld>
-            <a:endParaRPr lang="en-US"/>
-          </a:p>
-        </p:txBody>
-      </p:sp>
-      <p:sp>
-        <p:nvSpPr>
-          <p:cNvPr id="4" name="Slide Image Placeholder 3"/>
-          <p:cNvSpPr>
-            <a:spLocks noGrp="1" noRot="1" noChangeAspect="1"/>
-          </p:cNvSpPr>
-          <p:nvPr>
-            <p:ph type="sldImg" idx="2"/>
-          </p:nvPr>
-        </p:nvSpPr>
-        <p:spPr>
-          <a:xfrm>
-            <a:off x="685800" y="1143000"/>
-            <a:ext cx="5486400" cy="3086100"/>
-          </a:xfrm>
-          <a:prstGeom prst="rect">
-            <a:avLst/>
-          </a:prstGeom>
-          <a:noFill/>
-          <a:ln w="12700">
-            <a:solidFill>
-              <a:prstClr val="black"/>
-            </a:solidFill>
-          </a:ln>
-        </p:spPr>
-        <p:txBody>
-          <a:bodyPr vert="horz" lIns="91440" tIns="45720" rIns="91440" bIns="45720" rtlCol="0" anchor="ctr"/>
-          <a:lstStyle/>
-          <a:p>
-            <a:endParaRPr lang="en-US"/>
-          </a:p>
-        </p:txBody>
-      </p:sp>
-      <p:sp>
-        <p:nvSpPr>
-          <p:cNvPr id="5" name="Notes Placeholder 4"/>
-          <p:cNvSpPr>
-            <a:spLocks noGrp="1"/>
-          </p:cNvSpPr>
-          <p:nvPr>
-            <p:ph type="body" sz="quarter" idx="3"/>
-          </p:nvPr>
-        </p:nvSpPr>
-        <p:spPr>
-          <a:xfrm>
-            <a:off x="685800" y="4400550"/>
-            <a:ext cx="5486400" cy="3600450"/>
-          </a:xfrm>
-          <a:prstGeom prst="rect">
-            <a:avLst/>
-          </a:prstGeom>
-        </p:spPr>
-        <p:txBody>
-          <a:bodyPr vert="horz" lIns="91440" tIns="45720" rIns="91440" bIns="45720" rtlCol="0"/>
-          <a:lstStyle/>
-          <a:p>
-            <a:pPr lvl="0"/>
-            <a:r>
-              <a:rPr lang="en-US"/>
-              <a:t>Click to edit Master text styles</a:t>
-            </a:r>
-          </a:p>
-          <a:p>
-            <a:pPr lvl="1"/>
-            <a:r>
-              <a:rPr lang="en-US"/>
-              <a:t>Second level</a:t>
-            </a:r>
-          </a:p>
-          <a:p>
-            <a:pPr lvl="2"/>
-            <a:r>
-              <a:rPr lang="en-US"/>
-              <a:t>Third level</a:t>
-            </a:r>
-          </a:p>
-          <a:p>
-            <a:pPr lvl="3"/>
-            <a:r>
-              <a:rPr lang="en-US"/>
-              <a:t>Fourth level</a:t>
-            </a:r>
-          </a:p>
-          <a:p>
-            <a:pPr lvl="4"/>
-            <a:r>
-              <a:rPr lang="en-US"/>
-              <a:t>Fifth level</a:t>
-            </a:r>
-          </a:p>
-        </p:txBody>
-      </p:sp>
-      <p:sp>
-        <p:nvSpPr>
-          <p:cNvPr id="6" name="Footer Placeholder 5"/>
-          <p:cNvSpPr>
-            <a:spLocks noGrp="1"/>
-          </p:cNvSpPr>
-          <p:nvPr>
-            <p:ph type="ftr" sz="quarter" idx="4"/>
-          </p:nvPr>
-        </p:nvSpPr>
-        <p:spPr>
-          <a:xfrm>
-            <a:off x="0" y="8685213"/>
-            <a:ext cx="2971800" cy="458787"/>
-          </a:xfrm>
-          <a:prstGeom prst="rect">
-            <a:avLst/>
-          </a:prstGeom>
-        </p:spPr>
-        <p:txBody>
-          <a:bodyPr vert="horz" lIns="91440" tIns="45720" rIns="91440" bIns="45720" rtlCol="0" anchor="b"/>
-          <a:lstStyle>
-            <a:lvl1pPr algn="l">
-              <a:defRPr sz="1200"/>
-            </a:lvl1pPr>
-          </a:lstStyle>
-          <a:p>
-            <a:endParaRPr lang="en-US"/>
-          </a:p>
-        </p:txBody>
-      </p:sp>
-      <p:sp>
-        <p:nvSpPr>
-          <p:cNvPr id="7" name="Slide Number Placeholder 6"/>
-          <p:cNvSpPr>
-            <a:spLocks noGrp="1"/>
-          </p:cNvSpPr>
-          <p:nvPr>
-            <p:ph type="sldNum" sz="quarter" idx="5"/>
-          </p:nvPr>
-        </p:nvSpPr>
-        <p:spPr>
-          <a:xfrm>
-            <a:off x="3884613" y="8685213"/>
-            <a:ext cx="2971800" cy="458787"/>
-          </a:xfrm>
-          <a:prstGeom prst="rect">
-            <a:avLst/>
-          </a:prstGeom>
-        </p:spPr>
-        <p:txBody>
-          <a:bodyPr vert="horz" lIns="91440" tIns="45720" rIns="91440" bIns="45720" rtlCol="0" anchor="b"/>
-          <a:lstStyle>
-            <a:lvl1pPr algn="r">
-              <a:defRPr sz="1200"/>
-            </a:lvl1pPr>
-          </a:lstStyle>
-          <a:p>
-            <a:fld id="{CE5E9CC1-C706-0F49-92D6-E571CC5EEA8F}" type="slidenum">
-              <a:rPr lang="en-US"/>
-              <a:t>‹#›</a:t>
-            </a:fld>
-            <a:endParaRPr lang="en-US"/>
-          </a:p>
-        </p:txBody>
-      </p:sp>
     </p:spTree>
     <p:extLst>
       <p:ext uri="{BB962C8B-B14F-4D97-AF65-F5344CB8AC3E}">
-        <p14:creationId xmlns:p14="http://schemas.microsoft.com/office/powerpoint/2010/main" val="1024086991"/>
+        <p14:creationId xmlns:p14="http://schemas.microsoft.com/office/powerpoint/2010/main" val="2320211301"/>
       </p:ext>
     </p:extLst>
   </p:cSld>
@@ -504,10 +289,6 @@
           <a:bodyPr/>
           <a:lstStyle/>
           <a:p>
-            <a:r>
-              <a:rPr lang="en-US" dirty="0"/>
-              <a:t/>
-            </a:r>
             <a:endParaRPr lang="en-US" dirty="0"/>
           </a:p>
         </p:txBody>
@@ -592,10 +373,6 @@
           <a:bodyPr/>
           <a:lstStyle/>
           <a:p>
-            <a:r>
-              <a:rPr lang="en-US" dirty="0"/>
-              <a:t/>
-            </a:r>
             <a:endParaRPr lang="en-US" dirty="0"/>
           </a:p>
         </p:txBody>
@@ -680,10 +457,6 @@
           <a:bodyPr/>
           <a:lstStyle/>
           <a:p>
-            <a:r>
-              <a:rPr lang="en-US" dirty="0"/>
-              <a:t/>
-            </a:r>
             <a:endParaRPr lang="en-US" dirty="0"/>
           </a:p>
         </p:txBody>
@@ -768,10 +541,6 @@
           <a:bodyPr/>
           <a:lstStyle/>
           <a:p>
-            <a:r>
-              <a:rPr lang="en-US" dirty="0"/>
-              <a:t/>
-            </a:r>
             <a:endParaRPr lang="en-US" dirty="0"/>
           </a:p>
         </p:txBody>
@@ -856,10 +625,6 @@
           <a:bodyPr/>
           <a:lstStyle/>
           <a:p>
-            <a:r>
-              <a:rPr lang="en-US" dirty="0"/>
-              <a:t/>
-            </a:r>
             <a:endParaRPr lang="en-US" dirty="0"/>
           </a:p>
         </p:txBody>
@@ -933,6 +698,11 @@
 <file path=ppt/slideMasters/slideMaster1.xml><?xml version="1.0" encoding="utf-8"?>
 <p:sldMaster xmlns:a="http://schemas.openxmlformats.org/drawingml/2006/main" xmlns:r="http://schemas.openxmlformats.org/officeDocument/2006/relationships" xmlns:p="http://schemas.openxmlformats.org/presentationml/2006/main">
   <p:cSld>
+    <p:bg>
+      <p:bgRef idx="1001">
+        <a:schemeClr val="bg1"/>
+      </p:bgRef>
+    </p:bg>
     <p:spTree>
       <p:nvGrpSpPr>
         <p:cNvPr id="1" name=""/>
@@ -1215,6 +985,7 @@
         <a:solidFill>
           <a:srgbClr val="0B0D12"/>
         </a:solidFill>
+        <a:effectLst/>
       </p:bgPr>
     </p:bg>
     <p:spTree>
@@ -1233,14 +1004,14 @@
       </p:grpSpPr>
       <p:pic>
         <p:nvPicPr>
-          <p:cNvPr id="2" name="Image 0" descr="/Users/dev/Documents/ezoncall/web/public/logo.png">    </p:cNvPr>
+          <p:cNvPr id="2" name="Image 0" descr="/Users/dev/Documents/ezoncall/web/public/logo.png"/>
           <p:cNvPicPr>
             <a:picLocks noChangeAspect="1"/>
           </p:cNvPicPr>
           <p:nvPr/>
         </p:nvPicPr>
         <p:blipFill>
-          <a:blip r:embed="rId1"/>
+          <a:blip r:embed="rId3"/>
           <a:stretch>
             <a:fillRect/>
           </a:stretch>
@@ -1276,11 +1047,11 @@
           <a:bodyPr wrap="square" lIns="0" tIns="0" rIns="0" bIns="0" rtlCol="0" anchor="t"/>
           <a:lstStyle/>
           <a:p>
-            <a:pPr algn="ctr" indent="0" marL="0">
+            <a:pPr marL="0" indent="0" algn="ctr">
               <a:buNone/>
             </a:pPr>
             <a:r>
-              <a:rPr lang="en-US" sz="1400" b="1" spc="600" kern="0" dirty="0">
+              <a:rPr lang="en-US" sz="1400" b="1" kern="0" spc="600" dirty="0">
                 <a:solidFill>
                   <a:srgbClr val="34D399"/>
                 </a:solidFill>
@@ -1315,7 +1086,7 @@
           <a:bodyPr wrap="square" lIns="0" tIns="0" rIns="0" bIns="0" rtlCol="0" anchor="t"/>
           <a:lstStyle/>
           <a:p>
-            <a:pPr algn="ctr" indent="0" marL="0">
+            <a:pPr marL="0" indent="0" algn="ctr">
               <a:buNone/>
             </a:pPr>
             <a:r>
@@ -1354,7 +1125,7 @@
           <a:bodyPr wrap="square" lIns="0" tIns="0" rIns="0" bIns="0" rtlCol="0" anchor="t"/>
           <a:lstStyle/>
           <a:p>
-            <a:pPr algn="ctr" indent="0" marL="0">
+            <a:pPr marL="0" indent="0" algn="ctr">
               <a:lnSpc>
                 <a:spcPct val="130000"/>
               </a:lnSpc>
@@ -1369,7 +1140,7 @@
                 <a:ea typeface="Helvetica Neue" pitchFamily="34" charset="-122"/>
                 <a:cs typeface="Helvetica Neue" pitchFamily="34" charset="-120"/>
               </a:rPr>
-              <a:t>Specialist agents convene in your Telegram group, debate the fix out loud, and ship only when you approve by voice.</a:t>
+              <a:t>Specialist agents convene in your Discord Server and Telegram group, debate the fix out loud, and ship only when you approve by voice.</a:t>
             </a:r>
             <a:endParaRPr lang="en-US" sz="1600" dirty="0"/>
           </a:p>
@@ -1396,11 +1167,11 @@
           <a:bodyPr wrap="square" lIns="0" tIns="0" rIns="0" bIns="0" rtlCol="0" anchor="t"/>
           <a:lstStyle/>
           <a:p>
-            <a:pPr algn="ctr" indent="0" marL="0">
+            <a:pPr marL="0" indent="0" algn="ctr">
               <a:buNone/>
             </a:pPr>
             <a:r>
-              <a:rPr lang="en-US" sz="1000" spc="100" kern="0" dirty="0">
+              <a:rPr lang="en-US" sz="1000" kern="0" spc="100" dirty="0">
                 <a:solidFill>
                   <a:srgbClr val="667085"/>
                 </a:solidFill>
@@ -1408,7 +1179,7 @@
                 <a:ea typeface="Menlo" pitchFamily="34" charset="-122"/>
                 <a:cs typeface="Menlo" pitchFamily="34" charset="-120"/>
               </a:rPr>
-              <a:t>incident response · multi-agent · in Telegram</a:t>
+              <a:t>Incident Response · Multi-agent · In Discord and Telegram</a:t>
             </a:r>
             <a:endParaRPr lang="en-US" sz="1000" dirty="0"/>
           </a:p>
@@ -1430,6 +1201,7 @@
         <a:solidFill>
           <a:srgbClr val="FBFBFC"/>
         </a:solidFill>
+        <a:effectLst/>
       </p:bgPr>
     </p:bg>
     <p:spTree>
@@ -1467,11 +1239,11 @@
           <a:bodyPr wrap="square" lIns="0" tIns="0" rIns="0" bIns="0" rtlCol="0" anchor="ctr"/>
           <a:lstStyle/>
           <a:p>
-            <a:pPr algn="l" indent="0" marL="0">
+            <a:pPr marL="0" indent="0" algn="l">
               <a:buNone/>
             </a:pPr>
             <a:r>
-              <a:rPr lang="en-US" sz="1200" spc="300" kern="0" dirty="0">
+              <a:rPr lang="en-US" sz="1200" kern="0" spc="300" dirty="0">
                 <a:solidFill>
                   <a:srgbClr val="5A6472"/>
                 </a:solidFill>
@@ -1506,7 +1278,7 @@
           <a:bodyPr wrap="square" lIns="0" tIns="0" rIns="0" bIns="0" rtlCol="0" anchor="t"/>
           <a:lstStyle/>
           <a:p>
-            <a:pPr algn="l" indent="0" marL="0">
+            <a:pPr marL="0" indent="0" algn="l">
               <a:lnSpc>
                 <a:spcPct val="102000"/>
               </a:lnSpc>
@@ -1526,7 +1298,7 @@
             <a:endParaRPr lang="en-US" sz="4200" dirty="0"/>
           </a:p>
           <a:p>
-            <a:pPr algn="l" indent="0" marL="0">
+            <a:pPr marL="0" indent="0" algn="l">
               <a:lnSpc>
                 <a:spcPct val="102000"/>
               </a:lnSpc>
@@ -1568,7 +1340,7 @@
           <a:bodyPr wrap="square" lIns="0" tIns="0" rIns="0" bIns="0" rtlCol="0" anchor="t"/>
           <a:lstStyle/>
           <a:p>
-            <a:pPr algn="l" indent="0" marL="0">
+            <a:pPr marL="0" indent="0" algn="l">
               <a:lnSpc>
                 <a:spcPct val="128000"/>
               </a:lnSpc>
@@ -1610,11 +1382,11 @@
           <a:bodyPr wrap="square" lIns="0" tIns="0" rIns="0" bIns="0" rtlCol="0" anchor="ctr"/>
           <a:lstStyle/>
           <a:p>
-            <a:pPr indent="0" marL="0">
+            <a:pPr marL="0" indent="0">
               <a:buNone/>
             </a:pPr>
             <a:r>
-              <a:rPr lang="en-US" sz="1100" spc="200" kern="0" dirty="0">
+              <a:rPr lang="en-US" sz="1100" kern="0" spc="200" dirty="0">
                 <a:solidFill>
                   <a:srgbClr val="97A0AD"/>
                 </a:solidFill>
@@ -1649,7 +1421,7 @@
           <a:bodyPr wrap="square" lIns="0" tIns="0" rIns="0" bIns="0" rtlCol="0" anchor="t"/>
           <a:lstStyle/>
           <a:p>
-            <a:pPr indent="0" marL="0">
+            <a:pPr marL="0" indent="0">
               <a:buNone/>
             </a:pPr>
             <a:r>
@@ -1688,7 +1460,7 @@
           <a:bodyPr wrap="square" lIns="0" tIns="0" rIns="0" bIns="0" rtlCol="0" anchor="ctr"/>
           <a:lstStyle/>
           <a:p>
-            <a:pPr algn="ctr" indent="0" marL="0">
+            <a:pPr marL="0" indent="0" algn="ctr">
               <a:buNone/>
             </a:pPr>
             <a:r>
@@ -1727,11 +1499,11 @@
           <a:bodyPr wrap="square" lIns="0" tIns="0" rIns="0" bIns="0" rtlCol="0" anchor="ctr"/>
           <a:lstStyle/>
           <a:p>
-            <a:pPr indent="0" marL="0">
+            <a:pPr marL="0" indent="0">
               <a:buNone/>
             </a:pPr>
             <a:r>
-              <a:rPr lang="en-US" sz="1100" spc="200" kern="0" dirty="0">
+              <a:rPr lang="en-US" sz="1100" kern="0" spc="200" dirty="0">
                 <a:solidFill>
                   <a:srgbClr val="047857"/>
                 </a:solidFill>
@@ -1764,6 +1536,13 @@
           </a:solidFill>
           <a:ln/>
         </p:spPr>
+        <p:txBody>
+          <a:bodyPr/>
+          <a:lstStyle/>
+          <a:p>
+            <a:endParaRPr lang="en-US"/>
+          </a:p>
+        </p:txBody>
       </p:sp>
       <p:sp>
         <p:nvSpPr>
@@ -1784,6 +1563,13 @@
           </a:solidFill>
           <a:ln/>
         </p:spPr>
+        <p:txBody>
+          <a:bodyPr/>
+          <a:lstStyle/>
+          <a:p>
+            <a:endParaRPr lang="en-US"/>
+          </a:p>
+        </p:txBody>
       </p:sp>
       <p:sp>
         <p:nvSpPr>
@@ -1804,6 +1590,13 @@
           </a:solidFill>
           <a:ln/>
         </p:spPr>
+        <p:txBody>
+          <a:bodyPr/>
+          <a:lstStyle/>
+          <a:p>
+            <a:endParaRPr lang="en-US"/>
+          </a:p>
+        </p:txBody>
       </p:sp>
       <p:sp>
         <p:nvSpPr>
@@ -1824,6 +1617,13 @@
           </a:solidFill>
           <a:ln/>
         </p:spPr>
+        <p:txBody>
+          <a:bodyPr/>
+          <a:lstStyle/>
+          <a:p>
+            <a:endParaRPr lang="en-US"/>
+          </a:p>
+        </p:txBody>
       </p:sp>
       <p:sp>
         <p:nvSpPr>
@@ -1844,6 +1644,13 @@
           </a:solidFill>
           <a:ln/>
         </p:spPr>
+        <p:txBody>
+          <a:bodyPr/>
+          <a:lstStyle/>
+          <a:p>
+            <a:endParaRPr lang="en-US"/>
+          </a:p>
+        </p:txBody>
       </p:sp>
       <p:sp>
         <p:nvSpPr>
@@ -1866,7 +1673,7 @@
           <a:bodyPr wrap="square" lIns="0" tIns="0" rIns="0" bIns="0" rtlCol="0" anchor="t"/>
           <a:lstStyle/>
           <a:p>
-            <a:pPr indent="0" marL="0">
+            <a:pPr marL="0" indent="0">
               <a:buNone/>
             </a:pPr>
             <a:r>
@@ -1900,6 +1707,7 @@
         <a:solidFill>
           <a:srgbClr val="FBFBFC"/>
         </a:solidFill>
+        <a:effectLst/>
       </p:bgPr>
     </p:bg>
     <p:spTree>
@@ -1937,11 +1745,11 @@
           <a:bodyPr wrap="square" lIns="0" tIns="0" rIns="0" bIns="0" rtlCol="0" anchor="ctr"/>
           <a:lstStyle/>
           <a:p>
-            <a:pPr algn="l" indent="0" marL="0">
+            <a:pPr marL="0" indent="0" algn="l">
               <a:buNone/>
             </a:pPr>
             <a:r>
-              <a:rPr lang="en-US" sz="1200" spc="300" kern="0" dirty="0">
+              <a:rPr lang="en-US" sz="1200" kern="0" spc="300" dirty="0">
                 <a:solidFill>
                   <a:srgbClr val="5A6472"/>
                 </a:solidFill>
@@ -1976,7 +1784,7 @@
           <a:bodyPr wrap="square" lIns="0" tIns="0" rIns="0" bIns="0" rtlCol="0" anchor="t"/>
           <a:lstStyle/>
           <a:p>
-            <a:pPr algn="l" indent="0" marL="0">
+            <a:pPr marL="0" indent="0" algn="l">
               <a:lnSpc>
                 <a:spcPct val="102000"/>
               </a:lnSpc>
@@ -2018,7 +1826,7 @@
           <a:bodyPr wrap="square" lIns="0" tIns="0" rIns="0" bIns="0" rtlCol="0" anchor="t"/>
           <a:lstStyle/>
           <a:p>
-            <a:pPr algn="l" indent="0" marL="0">
+            <a:pPr marL="0" indent="0" algn="l">
               <a:lnSpc>
                 <a:spcPct val="128000"/>
               </a:lnSpc>
@@ -2065,13 +1873,20 @@
             <a:prstDash val="solid"/>
           </a:ln>
           <a:effectLst>
-            <a:outerShdw sx="100000" sy="100000" kx="0" ky="0" algn="bl" rotWithShape="0" blurRad="127000" dist="38100" dir="5400000">
+            <a:outerShdw blurRad="127000" dist="38100" dir="5400000" algn="bl" rotWithShape="0">
               <a:srgbClr val="0B0D12">
                 <a:alpha val="10000"/>
               </a:srgbClr>
             </a:outerShdw>
           </a:effectLst>
         </p:spPr>
+        <p:txBody>
+          <a:bodyPr/>
+          <a:lstStyle/>
+          <a:p>
+            <a:endParaRPr lang="en-US"/>
+          </a:p>
+        </p:txBody>
       </p:sp>
       <p:sp>
         <p:nvSpPr>
@@ -2092,6 +1907,13 @@
           </a:solidFill>
           <a:ln/>
         </p:spPr>
+        <p:txBody>
+          <a:bodyPr/>
+          <a:lstStyle/>
+          <a:p>
+            <a:endParaRPr lang="en-US"/>
+          </a:p>
+        </p:txBody>
       </p:sp>
       <p:sp>
         <p:nvSpPr>
@@ -2114,7 +1936,7 @@
           <a:bodyPr wrap="square" lIns="0" tIns="0" rIns="0" bIns="0" rtlCol="0" anchor="t"/>
           <a:lstStyle/>
           <a:p>
-            <a:pPr indent="0" marL="0">
+            <a:pPr marL="0" indent="0">
               <a:buNone/>
             </a:pPr>
             <a:r>
@@ -2153,7 +1975,7 @@
           <a:bodyPr wrap="square" lIns="0" tIns="0" rIns="0" bIns="0" rtlCol="0" anchor="t"/>
           <a:lstStyle/>
           <a:p>
-            <a:pPr indent="0" marL="0">
+            <a:pPr marL="0" indent="0">
               <a:lnSpc>
                 <a:spcPct val="120000"/>
               </a:lnSpc>
@@ -2195,6 +2017,13 @@
           </a:solidFill>
           <a:ln/>
         </p:spPr>
+        <p:txBody>
+          <a:bodyPr/>
+          <a:lstStyle/>
+          <a:p>
+            <a:endParaRPr lang="en-US"/>
+          </a:p>
+        </p:txBody>
       </p:sp>
       <p:sp>
         <p:nvSpPr>
@@ -2217,7 +2046,7 @@
           <a:bodyPr wrap="square" lIns="0" tIns="0" rIns="0" bIns="0" rtlCol="0" anchor="ctr"/>
           <a:lstStyle/>
           <a:p>
-            <a:pPr algn="ctr" indent="0" marL="0">
+            <a:pPr marL="0" indent="0" algn="ctr">
               <a:buNone/>
             </a:pPr>
             <a:r>
@@ -2261,13 +2090,20 @@
             <a:prstDash val="solid"/>
           </a:ln>
           <a:effectLst>
-            <a:outerShdw sx="100000" sy="100000" kx="0" ky="0" algn="bl" rotWithShape="0" blurRad="127000" dist="38100" dir="5400000">
+            <a:outerShdw blurRad="127000" dist="38100" dir="5400000" algn="bl" rotWithShape="0">
               <a:srgbClr val="0B0D12">
                 <a:alpha val="10000"/>
               </a:srgbClr>
             </a:outerShdw>
           </a:effectLst>
         </p:spPr>
+        <p:txBody>
+          <a:bodyPr/>
+          <a:lstStyle/>
+          <a:p>
+            <a:endParaRPr lang="en-US"/>
+          </a:p>
+        </p:txBody>
       </p:sp>
       <p:sp>
         <p:nvSpPr>
@@ -2288,6 +2124,13 @@
           </a:solidFill>
           <a:ln/>
         </p:spPr>
+        <p:txBody>
+          <a:bodyPr/>
+          <a:lstStyle/>
+          <a:p>
+            <a:endParaRPr lang="en-US"/>
+          </a:p>
+        </p:txBody>
       </p:sp>
       <p:sp>
         <p:nvSpPr>
@@ -2310,7 +2153,7 @@
           <a:bodyPr wrap="square" lIns="0" tIns="0" rIns="0" bIns="0" rtlCol="0" anchor="t"/>
           <a:lstStyle/>
           <a:p>
-            <a:pPr indent="0" marL="0">
+            <a:pPr marL="0" indent="0">
               <a:buNone/>
             </a:pPr>
             <a:r>
@@ -2349,7 +2192,7 @@
           <a:bodyPr wrap="square" lIns="0" tIns="0" rIns="0" bIns="0" rtlCol="0" anchor="t"/>
           <a:lstStyle/>
           <a:p>
-            <a:pPr indent="0" marL="0">
+            <a:pPr marL="0" indent="0">
               <a:lnSpc>
                 <a:spcPct val="120000"/>
               </a:lnSpc>
@@ -2391,6 +2234,13 @@
           </a:solidFill>
           <a:ln/>
         </p:spPr>
+        <p:txBody>
+          <a:bodyPr/>
+          <a:lstStyle/>
+          <a:p>
+            <a:endParaRPr lang="en-US"/>
+          </a:p>
+        </p:txBody>
       </p:sp>
       <p:sp>
         <p:nvSpPr>
@@ -2413,7 +2263,7 @@
           <a:bodyPr wrap="square" lIns="0" tIns="0" rIns="0" bIns="0" rtlCol="0" anchor="ctr"/>
           <a:lstStyle/>
           <a:p>
-            <a:pPr algn="ctr" indent="0" marL="0">
+            <a:pPr marL="0" indent="0" algn="ctr">
               <a:buNone/>
             </a:pPr>
             <a:r>
@@ -2457,13 +2307,20 @@
             <a:prstDash val="solid"/>
           </a:ln>
           <a:effectLst>
-            <a:outerShdw sx="100000" sy="100000" kx="0" ky="0" algn="bl" rotWithShape="0" blurRad="127000" dist="38100" dir="5400000">
+            <a:outerShdw blurRad="127000" dist="38100" dir="5400000" algn="bl" rotWithShape="0">
               <a:srgbClr val="0B0D12">
                 <a:alpha val="10000"/>
               </a:srgbClr>
             </a:outerShdw>
           </a:effectLst>
         </p:spPr>
+        <p:txBody>
+          <a:bodyPr/>
+          <a:lstStyle/>
+          <a:p>
+            <a:endParaRPr lang="en-US"/>
+          </a:p>
+        </p:txBody>
       </p:sp>
       <p:sp>
         <p:nvSpPr>
@@ -2484,6 +2341,13 @@
           </a:solidFill>
           <a:ln/>
         </p:spPr>
+        <p:txBody>
+          <a:bodyPr/>
+          <a:lstStyle/>
+          <a:p>
+            <a:endParaRPr lang="en-US"/>
+          </a:p>
+        </p:txBody>
       </p:sp>
       <p:sp>
         <p:nvSpPr>
@@ -2506,7 +2370,7 @@
           <a:bodyPr wrap="square" lIns="0" tIns="0" rIns="0" bIns="0" rtlCol="0" anchor="t"/>
           <a:lstStyle/>
           <a:p>
-            <a:pPr indent="0" marL="0">
+            <a:pPr marL="0" indent="0">
               <a:buNone/>
             </a:pPr>
             <a:r>
@@ -2545,7 +2409,7 @@
           <a:bodyPr wrap="square" lIns="0" tIns="0" rIns="0" bIns="0" rtlCol="0" anchor="t"/>
           <a:lstStyle/>
           <a:p>
-            <a:pPr indent="0" marL="0">
+            <a:pPr marL="0" indent="0">
               <a:lnSpc>
                 <a:spcPct val="120000"/>
               </a:lnSpc>
@@ -2587,6 +2451,13 @@
           </a:solidFill>
           <a:ln/>
         </p:spPr>
+        <p:txBody>
+          <a:bodyPr/>
+          <a:lstStyle/>
+          <a:p>
+            <a:endParaRPr lang="en-US"/>
+          </a:p>
+        </p:txBody>
       </p:sp>
       <p:sp>
         <p:nvSpPr>
@@ -2609,7 +2480,7 @@
           <a:bodyPr wrap="square" lIns="0" tIns="0" rIns="0" bIns="0" rtlCol="0" anchor="ctr"/>
           <a:lstStyle/>
           <a:p>
-            <a:pPr algn="ctr" indent="0" marL="0">
+            <a:pPr marL="0" indent="0" algn="ctr">
               <a:buNone/>
             </a:pPr>
             <a:r>
@@ -2653,13 +2524,20 @@
             <a:prstDash val="solid"/>
           </a:ln>
           <a:effectLst>
-            <a:outerShdw sx="100000" sy="100000" kx="0" ky="0" algn="bl" rotWithShape="0" blurRad="127000" dist="38100" dir="5400000">
+            <a:outerShdw blurRad="127000" dist="38100" dir="5400000" algn="bl" rotWithShape="0">
               <a:srgbClr val="0B0D12">
                 <a:alpha val="10000"/>
               </a:srgbClr>
             </a:outerShdw>
           </a:effectLst>
         </p:spPr>
+        <p:txBody>
+          <a:bodyPr/>
+          <a:lstStyle/>
+          <a:p>
+            <a:endParaRPr lang="en-US"/>
+          </a:p>
+        </p:txBody>
       </p:sp>
       <p:sp>
         <p:nvSpPr>
@@ -2680,6 +2558,13 @@
           </a:solidFill>
           <a:ln/>
         </p:spPr>
+        <p:txBody>
+          <a:bodyPr/>
+          <a:lstStyle/>
+          <a:p>
+            <a:endParaRPr lang="en-US"/>
+          </a:p>
+        </p:txBody>
       </p:sp>
       <p:sp>
         <p:nvSpPr>
@@ -2702,7 +2587,7 @@
           <a:bodyPr wrap="square" lIns="0" tIns="0" rIns="0" bIns="0" rtlCol="0" anchor="t"/>
           <a:lstStyle/>
           <a:p>
-            <a:pPr indent="0" marL="0">
+            <a:pPr marL="0" indent="0">
               <a:buNone/>
             </a:pPr>
             <a:r>
@@ -2741,7 +2626,7 @@
           <a:bodyPr wrap="square" lIns="0" tIns="0" rIns="0" bIns="0" rtlCol="0" anchor="t"/>
           <a:lstStyle/>
           <a:p>
-            <a:pPr indent="0" marL="0">
+            <a:pPr marL="0" indent="0">
               <a:lnSpc>
                 <a:spcPct val="120000"/>
               </a:lnSpc>
@@ -2783,6 +2668,13 @@
           </a:solidFill>
           <a:ln/>
         </p:spPr>
+        <p:txBody>
+          <a:bodyPr/>
+          <a:lstStyle/>
+          <a:p>
+            <a:endParaRPr lang="en-US"/>
+          </a:p>
+        </p:txBody>
       </p:sp>
       <p:sp>
         <p:nvSpPr>
@@ -2805,7 +2697,7 @@
           <a:bodyPr wrap="square" lIns="0" tIns="0" rIns="0" bIns="0" rtlCol="0" anchor="ctr"/>
           <a:lstStyle/>
           <a:p>
-            <a:pPr algn="ctr" indent="0" marL="0">
+            <a:pPr marL="0" indent="0" algn="ctr">
               <a:buNone/>
             </a:pPr>
             <a:r>
@@ -2849,13 +2741,20 @@
             <a:prstDash val="solid"/>
           </a:ln>
           <a:effectLst>
-            <a:outerShdw sx="100000" sy="100000" kx="0" ky="0" algn="bl" rotWithShape="0" blurRad="127000" dist="38100" dir="5400000">
+            <a:outerShdw blurRad="127000" dist="38100" dir="5400000" algn="bl" rotWithShape="0">
               <a:srgbClr val="0B0D12">
                 <a:alpha val="10000"/>
               </a:srgbClr>
             </a:outerShdw>
           </a:effectLst>
         </p:spPr>
+        <p:txBody>
+          <a:bodyPr/>
+          <a:lstStyle/>
+          <a:p>
+            <a:endParaRPr lang="en-US"/>
+          </a:p>
+        </p:txBody>
       </p:sp>
       <p:sp>
         <p:nvSpPr>
@@ -2876,6 +2775,13 @@
           </a:solidFill>
           <a:ln/>
         </p:spPr>
+        <p:txBody>
+          <a:bodyPr/>
+          <a:lstStyle/>
+          <a:p>
+            <a:endParaRPr lang="en-US"/>
+          </a:p>
+        </p:txBody>
       </p:sp>
       <p:sp>
         <p:nvSpPr>
@@ -2898,7 +2804,7 @@
           <a:bodyPr wrap="square" lIns="0" tIns="0" rIns="0" bIns="0" rtlCol="0" anchor="t"/>
           <a:lstStyle/>
           <a:p>
-            <a:pPr indent="0" marL="0">
+            <a:pPr marL="0" indent="0">
               <a:buNone/>
             </a:pPr>
             <a:r>
@@ -2937,7 +2843,7 @@
           <a:bodyPr wrap="square" lIns="0" tIns="0" rIns="0" bIns="0" rtlCol="0" anchor="t"/>
           <a:lstStyle/>
           <a:p>
-            <a:pPr indent="0" marL="0">
+            <a:pPr marL="0" indent="0">
               <a:lnSpc>
                 <a:spcPct val="120000"/>
               </a:lnSpc>
@@ -2979,6 +2885,13 @@
           </a:solidFill>
           <a:ln/>
         </p:spPr>
+        <p:txBody>
+          <a:bodyPr/>
+          <a:lstStyle/>
+          <a:p>
+            <a:endParaRPr lang="en-US"/>
+          </a:p>
+        </p:txBody>
       </p:sp>
       <p:sp>
         <p:nvSpPr>
@@ -3001,7 +2914,7 @@
           <a:bodyPr wrap="square" lIns="0" tIns="0" rIns="0" bIns="0" rtlCol="0" anchor="ctr"/>
           <a:lstStyle/>
           <a:p>
-            <a:pPr algn="ctr" indent="0" marL="0">
+            <a:pPr marL="0" indent="0" algn="ctr">
               <a:buNone/>
             </a:pPr>
             <a:r>
@@ -3035,6 +2948,7 @@
         <a:solidFill>
           <a:srgbClr val="FBFBFC"/>
         </a:solidFill>
+        <a:effectLst/>
       </p:bgPr>
     </p:bg>
     <p:spTree>
@@ -3072,11 +2986,11 @@
           <a:bodyPr wrap="square" lIns="0" tIns="0" rIns="0" bIns="0" rtlCol="0" anchor="ctr"/>
           <a:lstStyle/>
           <a:p>
-            <a:pPr algn="l" indent="0" marL="0">
+            <a:pPr marL="0" indent="0" algn="l">
               <a:buNone/>
             </a:pPr>
             <a:r>
-              <a:rPr lang="en-US" sz="1200" spc="300" kern="0" dirty="0">
+              <a:rPr lang="en-US" sz="1200" kern="0" spc="300" dirty="0">
                 <a:solidFill>
                   <a:srgbClr val="5A6472"/>
                 </a:solidFill>
@@ -3111,7 +3025,7 @@
           <a:bodyPr wrap="square" lIns="0" tIns="0" rIns="0" bIns="0" rtlCol="0" anchor="t"/>
           <a:lstStyle/>
           <a:p>
-            <a:pPr algn="l" indent="0" marL="0">
+            <a:pPr marL="0" indent="0" algn="l">
               <a:lnSpc>
                 <a:spcPct val="102000"/>
               </a:lnSpc>
@@ -3131,7 +3045,7 @@
             <a:endParaRPr lang="en-US" sz="3400" dirty="0"/>
           </a:p>
           <a:p>
-            <a:pPr algn="l" indent="0" marL="0">
+            <a:pPr marL="0" indent="0" algn="l">
               <a:lnSpc>
                 <a:spcPct val="102000"/>
               </a:lnSpc>
@@ -3178,13 +3092,20 @@
             <a:prstDash val="solid"/>
           </a:ln>
           <a:effectLst>
-            <a:outerShdw sx="100000" sy="100000" kx="0" ky="0" algn="bl" rotWithShape="0" blurRad="127000" dist="38100" dir="5400000">
+            <a:outerShdw blurRad="127000" dist="38100" dir="5400000" algn="bl" rotWithShape="0">
               <a:srgbClr val="0B0D12">
                 <a:alpha val="10000"/>
               </a:srgbClr>
             </a:outerShdw>
           </a:effectLst>
         </p:spPr>
+        <p:txBody>
+          <a:bodyPr/>
+          <a:lstStyle/>
+          <a:p>
+            <a:endParaRPr lang="en-US"/>
+          </a:p>
+        </p:txBody>
       </p:sp>
       <p:sp>
         <p:nvSpPr>
@@ -3207,11 +3128,11 @@
           <a:bodyPr wrap="square" lIns="0" tIns="0" rIns="0" bIns="0" rtlCol="0" anchor="ctr"/>
           <a:lstStyle/>
           <a:p>
-            <a:pPr indent="0" marL="0">
+            <a:pPr marL="0" indent="0">
               <a:buNone/>
             </a:pPr>
             <a:r>
-              <a:rPr lang="en-US" sz="1100" spc="200" kern="0" dirty="0">
+              <a:rPr lang="en-US" sz="1100" kern="0" spc="200" dirty="0">
                 <a:solidFill>
                   <a:srgbClr val="047857"/>
                 </a:solidFill>
@@ -3246,7 +3167,7 @@
           <a:bodyPr wrap="square" lIns="0" tIns="0" rIns="0" bIns="0" rtlCol="0" anchor="t"/>
           <a:lstStyle/>
           <a:p>
-            <a:pPr indent="0" marL="0">
+            <a:pPr marL="0" indent="0">
               <a:lnSpc>
                 <a:spcPct val="125000"/>
               </a:lnSpc>
@@ -3286,6 +3207,13 @@
           </a:solidFill>
           <a:ln/>
         </p:spPr>
+        <p:txBody>
+          <a:bodyPr/>
+          <a:lstStyle/>
+          <a:p>
+            <a:endParaRPr lang="en-US"/>
+          </a:p>
+        </p:txBody>
       </p:sp>
       <p:sp>
         <p:nvSpPr>
@@ -3306,6 +3234,13 @@
           </a:solidFill>
           <a:ln/>
         </p:spPr>
+        <p:txBody>
+          <a:bodyPr/>
+          <a:lstStyle/>
+          <a:p>
+            <a:endParaRPr lang="en-US"/>
+          </a:p>
+        </p:txBody>
       </p:sp>
       <p:sp>
         <p:nvSpPr>
@@ -3326,6 +3261,13 @@
           </a:solidFill>
           <a:ln/>
         </p:spPr>
+        <p:txBody>
+          <a:bodyPr/>
+          <a:lstStyle/>
+          <a:p>
+            <a:endParaRPr lang="en-US"/>
+          </a:p>
+        </p:txBody>
       </p:sp>
       <p:sp>
         <p:nvSpPr>
@@ -3348,6 +3290,13 @@
           </a:solidFill>
           <a:ln/>
         </p:spPr>
+        <p:txBody>
+          <a:bodyPr/>
+          <a:lstStyle/>
+          <a:p>
+            <a:endParaRPr lang="en-US"/>
+          </a:p>
+        </p:txBody>
       </p:sp>
       <p:sp>
         <p:nvSpPr>
@@ -3370,7 +3319,7 @@
           <a:bodyPr wrap="square" lIns="0" tIns="0" rIns="0" bIns="0" rtlCol="0" anchor="ctr"/>
           <a:lstStyle/>
           <a:p>
-            <a:pPr algn="ctr" indent="0" marL="0">
+            <a:pPr marL="0" indent="0" algn="ctr">
               <a:buNone/>
             </a:pPr>
             <a:r>
@@ -3414,13 +3363,20 @@
             <a:prstDash val="solid"/>
           </a:ln>
           <a:effectLst>
-            <a:outerShdw sx="100000" sy="100000" kx="0" ky="0" algn="bl" rotWithShape="0" blurRad="127000" dist="38100" dir="5400000">
+            <a:outerShdw blurRad="127000" dist="38100" dir="5400000" algn="bl" rotWithShape="0">
               <a:srgbClr val="0B0D12">
                 <a:alpha val="10000"/>
               </a:srgbClr>
             </a:outerShdw>
           </a:effectLst>
         </p:spPr>
+        <p:txBody>
+          <a:bodyPr/>
+          <a:lstStyle/>
+          <a:p>
+            <a:endParaRPr lang="en-US"/>
+          </a:p>
+        </p:txBody>
       </p:sp>
       <p:sp>
         <p:nvSpPr>
@@ -3443,11 +3399,11 @@
           <a:bodyPr wrap="square" lIns="0" tIns="0" rIns="0" bIns="0" rtlCol="0" anchor="ctr"/>
           <a:lstStyle/>
           <a:p>
-            <a:pPr indent="0" marL="0">
+            <a:pPr marL="0" indent="0">
               <a:buNone/>
             </a:pPr>
             <a:r>
-              <a:rPr lang="en-US" sz="1100" spc="200" kern="0" dirty="0">
+              <a:rPr lang="en-US" sz="1100" kern="0" spc="200" dirty="0">
                 <a:solidFill>
                   <a:srgbClr val="B45309"/>
                 </a:solidFill>
@@ -3482,7 +3438,7 @@
           <a:bodyPr wrap="square" lIns="0" tIns="0" rIns="0" bIns="0" rtlCol="0" anchor="t"/>
           <a:lstStyle/>
           <a:p>
-            <a:pPr indent="0" marL="0">
+            <a:pPr marL="0" indent="0">
               <a:lnSpc>
                 <a:spcPct val="125000"/>
               </a:lnSpc>
@@ -3524,6 +3480,13 @@
           </a:solidFill>
           <a:ln/>
         </p:spPr>
+        <p:txBody>
+          <a:bodyPr/>
+          <a:lstStyle/>
+          <a:p>
+            <a:endParaRPr lang="en-US"/>
+          </a:p>
+        </p:txBody>
       </p:sp>
       <p:sp>
         <p:nvSpPr>
@@ -3546,7 +3509,7 @@
           <a:bodyPr wrap="square" lIns="0" tIns="0" rIns="0" bIns="0" rtlCol="0" anchor="ctr"/>
           <a:lstStyle/>
           <a:p>
-            <a:pPr algn="ctr" indent="0" marL="0">
+            <a:pPr marL="0" indent="0" algn="ctr">
               <a:buNone/>
             </a:pPr>
             <a:r>
@@ -3585,7 +3548,7 @@
           <a:bodyPr wrap="square" lIns="0" tIns="0" rIns="0" bIns="0" rtlCol="0" anchor="ctr"/>
           <a:lstStyle/>
           <a:p>
-            <a:pPr algn="ctr" indent="0" marL="0">
+            <a:pPr marL="0" indent="0" algn="ctr">
               <a:buNone/>
             </a:pPr>
             <a:r>
@@ -3624,6 +3587,13 @@
           </a:solidFill>
           <a:ln/>
         </p:spPr>
+        <p:txBody>
+          <a:bodyPr/>
+          <a:lstStyle/>
+          <a:p>
+            <a:endParaRPr lang="en-US"/>
+          </a:p>
+        </p:txBody>
       </p:sp>
       <p:sp>
         <p:nvSpPr>
@@ -3646,7 +3616,7 @@
           <a:bodyPr wrap="square" lIns="0" tIns="0" rIns="0" bIns="0" rtlCol="0" anchor="ctr"/>
           <a:lstStyle/>
           <a:p>
-            <a:pPr algn="ctr" indent="0" marL="0">
+            <a:pPr marL="0" indent="0" algn="ctr">
               <a:buNone/>
             </a:pPr>
             <a:r>
@@ -3680,6 +3650,7 @@
         <a:solidFill>
           <a:srgbClr val="0B0D12"/>
         </a:solidFill>
+        <a:effectLst/>
       </p:bgPr>
     </p:bg>
     <p:spTree>
@@ -3698,14 +3669,14 @@
       </p:grpSpPr>
       <p:pic>
         <p:nvPicPr>
-          <p:cNvPr id="2" name="Image 0" descr="/Users/dev/Documents/ezoncall/web/public/logo.png">    </p:cNvPr>
+          <p:cNvPr id="2" name="Image 0" descr="/Users/dev/Documents/ezoncall/web/public/logo.png"/>
           <p:cNvPicPr>
             <a:picLocks noChangeAspect="1"/>
           </p:cNvPicPr>
           <p:nvPr/>
         </p:nvPicPr>
         <p:blipFill>
-          <a:blip r:embed="rId1"/>
+          <a:blip r:embed="rId3"/>
           <a:stretch>
             <a:fillRect/>
           </a:stretch>
@@ -3741,7 +3712,7 @@
           <a:bodyPr wrap="square" lIns="0" tIns="0" rIns="0" bIns="0" rtlCol="0" anchor="t"/>
           <a:lstStyle/>
           <a:p>
-            <a:pPr algn="ctr" indent="0" marL="0">
+            <a:pPr marL="0" indent="0" algn="ctr">
               <a:lnSpc>
                 <a:spcPct val="105000"/>
               </a:lnSpc>
@@ -3761,7 +3732,7 @@
             <a:endParaRPr lang="en-US" sz="4000" dirty="0"/>
           </a:p>
           <a:p>
-            <a:pPr algn="ctr" indent="0" marL="0">
+            <a:pPr marL="0" indent="0" algn="ctr">
               <a:lnSpc>
                 <a:spcPct val="105000"/>
               </a:lnSpc>
@@ -3803,7 +3774,7 @@
           <a:bodyPr wrap="square" lIns="0" tIns="0" rIns="0" bIns="0" rtlCol="0" anchor="t"/>
           <a:lstStyle/>
           <a:p>
-            <a:pPr algn="ctr" indent="0" marL="0">
+            <a:pPr marL="0" indent="0" algn="ctr">
               <a:buNone/>
             </a:pPr>
             <a:r>
@@ -3815,7 +3786,7 @@
                 <a:ea typeface="Helvetica Neue" pitchFamily="34" charset="-122"/>
                 <a:cs typeface="Helvetica Neue" pitchFamily="34" charset="-120"/>
               </a:rPr>
-              <a:t>It lives in Telegram — no dashboard to learn.</a:t>
+              <a:t>It lives in Discord and Telegram — no dashboard to learn.</a:t>
             </a:r>
             <a:endParaRPr lang="en-US" sz="1700" dirty="0"/>
           </a:p>
@@ -3842,11 +3813,11 @@
           <a:bodyPr wrap="square" lIns="0" tIns="0" rIns="0" bIns="0" rtlCol="0" anchor="t"/>
           <a:lstStyle/>
           <a:p>
-            <a:pPr algn="ctr" indent="0" marL="0">
+            <a:pPr marL="0" indent="0" algn="ctr">
               <a:buNone/>
             </a:pPr>
             <a:r>
-              <a:rPr lang="en-US" sz="1100" spc="200" kern="0" dirty="0">
+              <a:rPr lang="en-US" sz="1100" kern="0" spc="200" dirty="0">
                 <a:solidFill>
                   <a:srgbClr val="9BA1AB"/>
                 </a:solidFill>
@@ -3861,6 +3832,902 @@
         </p:txBody>
       </p:sp>
     </p:spTree>
+  </p:cSld>
+  <p:clrMapOvr>
+    <a:masterClrMapping/>
+  </p:clrMapOvr>
+</p:sld>
+</file>
+
+<file path=ppt/slides/slide6.xml><?xml version="1.0" encoding="utf-8"?>
+<p:sld xmlns:a="http://schemas.openxmlformats.org/drawingml/2006/main" xmlns:r="http://schemas.openxmlformats.org/officeDocument/2006/relationships" xmlns:p="http://schemas.openxmlformats.org/presentationml/2006/main">
+  <p:cSld>
+    <p:bg>
+      <p:bgPr>
+        <a:solidFill>
+          <a:schemeClr val="bg1"/>
+        </a:solidFill>
+        <a:effectLst/>
+      </p:bgPr>
+    </p:bg>
+    <p:spTree>
+      <p:nvGrpSpPr>
+        <p:cNvPr id="1" name=""/>
+        <p:cNvGrpSpPr/>
+        <p:nvPr/>
+      </p:nvGrpSpPr>
+      <p:grpSpPr>
+        <a:xfrm>
+          <a:off x="0" y="0"/>
+          <a:ext cx="0" cy="0"/>
+          <a:chOff x="0" y="0"/>
+          <a:chExt cx="0" cy="0"/>
+        </a:xfrm>
+      </p:grpSpPr>
+      <p:sp>
+        <p:nvSpPr>
+          <p:cNvPr id="10" name="Rectangle 9">
+            <a:extLst>
+              <a:ext uri="{FF2B5EF4-FFF2-40B4-BE49-F238E27FC236}">
+                <a16:creationId xmlns:a16="http://schemas.microsoft.com/office/drawing/2014/main" id="{42A4FC2C-047E-45A5-965D-8E1E3BF09BC6}"/>
+              </a:ext>
+              <a:ext uri="{C183D7F6-B498-43B3-948B-1728B52AA6E4}">
+                <adec:decorative xmlns:adec="http://schemas.microsoft.com/office/drawing/2017/decorative" val="1"/>
+              </a:ext>
+            </a:extLst>
+          </p:cNvPr>
+          <p:cNvSpPr>
+            <a:spLocks noGrp="1" noRot="1" noChangeAspect="1" noMove="1" noResize="1" noEditPoints="1" noAdjustHandles="1" noChangeArrowheads="1" noChangeShapeType="1" noTextEdit="1"/>
+          </p:cNvSpPr>
+          <p:nvPr>
+            <p:extLst>
+              <p:ext uri="{386F3935-93C4-4BCD-93E2-E3B085C9AB24}">
+                <p16:designElem xmlns:p16="http://schemas.microsoft.com/office/powerpoint/2015/main" val="1"/>
+              </p:ext>
+            </p:extLst>
+          </p:nvPr>
+        </p:nvSpPr>
+        <p:spPr bwMode="white">
+          <a:xfrm>
+            <a:off x="1524" y="0"/>
+            <a:ext cx="12188952" cy="6858000"/>
+          </a:xfrm>
+          <a:prstGeom prst="rect">
+            <a:avLst/>
+          </a:prstGeom>
+          <a:noFill/>
+          <a:ln>
+            <a:noFill/>
+          </a:ln>
+        </p:spPr>
+        <p:style>
+          <a:lnRef idx="2">
+            <a:schemeClr val="accent1">
+              <a:shade val="50000"/>
+            </a:schemeClr>
+          </a:lnRef>
+          <a:fillRef idx="1">
+            <a:schemeClr val="accent1"/>
+          </a:fillRef>
+          <a:effectRef idx="0">
+            <a:schemeClr val="accent1"/>
+          </a:effectRef>
+          <a:fontRef idx="minor">
+            <a:schemeClr val="lt1"/>
+          </a:fontRef>
+        </p:style>
+        <p:txBody>
+          <a:bodyPr rtlCol="0" anchor="ctr"/>
+          <a:lstStyle>
+            <a:defPPr>
+              <a:defRPr lang="en-US"/>
+            </a:defPPr>
+            <a:lvl1pPr marL="0" algn="l" defTabSz="914400" rtl="0" eaLnBrk="1" latinLnBrk="0" hangingPunct="1">
+              <a:defRPr sz="1800" kern="1200">
+                <a:solidFill>
+                  <a:schemeClr val="lt1"/>
+                </a:solidFill>
+                <a:latin typeface="+mn-lt"/>
+                <a:ea typeface="+mn-ea"/>
+                <a:cs typeface="+mn-cs"/>
+              </a:defRPr>
+            </a:lvl1pPr>
+            <a:lvl2pPr marL="457200" algn="l" defTabSz="914400" rtl="0" eaLnBrk="1" latinLnBrk="0" hangingPunct="1">
+              <a:defRPr sz="1800" kern="1200">
+                <a:solidFill>
+                  <a:schemeClr val="lt1"/>
+                </a:solidFill>
+                <a:latin typeface="+mn-lt"/>
+                <a:ea typeface="+mn-ea"/>
+                <a:cs typeface="+mn-cs"/>
+              </a:defRPr>
+            </a:lvl2pPr>
+            <a:lvl3pPr marL="914400" algn="l" defTabSz="914400" rtl="0" eaLnBrk="1" latinLnBrk="0" hangingPunct="1">
+              <a:defRPr sz="1800" kern="1200">
+                <a:solidFill>
+                  <a:schemeClr val="lt1"/>
+                </a:solidFill>
+                <a:latin typeface="+mn-lt"/>
+                <a:ea typeface="+mn-ea"/>
+                <a:cs typeface="+mn-cs"/>
+              </a:defRPr>
+            </a:lvl3pPr>
+            <a:lvl4pPr marL="1371600" algn="l" defTabSz="914400" rtl="0" eaLnBrk="1" latinLnBrk="0" hangingPunct="1">
+              <a:defRPr sz="1800" kern="1200">
+                <a:solidFill>
+                  <a:schemeClr val="lt1"/>
+                </a:solidFill>
+                <a:latin typeface="+mn-lt"/>
+                <a:ea typeface="+mn-ea"/>
+                <a:cs typeface="+mn-cs"/>
+              </a:defRPr>
+            </a:lvl4pPr>
+            <a:lvl5pPr marL="1828800" algn="l" defTabSz="914400" rtl="0" eaLnBrk="1" latinLnBrk="0" hangingPunct="1">
+              <a:defRPr sz="1800" kern="1200">
+                <a:solidFill>
+                  <a:schemeClr val="lt1"/>
+                </a:solidFill>
+                <a:latin typeface="+mn-lt"/>
+                <a:ea typeface="+mn-ea"/>
+                <a:cs typeface="+mn-cs"/>
+              </a:defRPr>
+            </a:lvl5pPr>
+            <a:lvl6pPr marL="2286000" algn="l" defTabSz="914400" rtl="0" eaLnBrk="1" latinLnBrk="0" hangingPunct="1">
+              <a:defRPr sz="1800" kern="1200">
+                <a:solidFill>
+                  <a:schemeClr val="lt1"/>
+                </a:solidFill>
+                <a:latin typeface="+mn-lt"/>
+                <a:ea typeface="+mn-ea"/>
+                <a:cs typeface="+mn-cs"/>
+              </a:defRPr>
+            </a:lvl6pPr>
+            <a:lvl7pPr marL="2743200" algn="l" defTabSz="914400" rtl="0" eaLnBrk="1" latinLnBrk="0" hangingPunct="1">
+              <a:defRPr sz="1800" kern="1200">
+                <a:solidFill>
+                  <a:schemeClr val="lt1"/>
+                </a:solidFill>
+                <a:latin typeface="+mn-lt"/>
+                <a:ea typeface="+mn-ea"/>
+                <a:cs typeface="+mn-cs"/>
+              </a:defRPr>
+            </a:lvl7pPr>
+            <a:lvl8pPr marL="3200400" algn="l" defTabSz="914400" rtl="0" eaLnBrk="1" latinLnBrk="0" hangingPunct="1">
+              <a:defRPr sz="1800" kern="1200">
+                <a:solidFill>
+                  <a:schemeClr val="lt1"/>
+                </a:solidFill>
+                <a:latin typeface="+mn-lt"/>
+                <a:ea typeface="+mn-ea"/>
+                <a:cs typeface="+mn-cs"/>
+              </a:defRPr>
+            </a:lvl8pPr>
+            <a:lvl9pPr marL="3657600" algn="l" defTabSz="914400" rtl="0" eaLnBrk="1" latinLnBrk="0" hangingPunct="1">
+              <a:defRPr sz="1800" kern="1200">
+                <a:solidFill>
+                  <a:schemeClr val="lt1"/>
+                </a:solidFill>
+                <a:latin typeface="+mn-lt"/>
+                <a:ea typeface="+mn-ea"/>
+                <a:cs typeface="+mn-cs"/>
+              </a:defRPr>
+            </a:lvl9pPr>
+          </a:lstStyle>
+          <a:p>
+            <a:pPr algn="ctr"/>
+            <a:endParaRPr lang="en-US"/>
+          </a:p>
+        </p:txBody>
+      </p:sp>
+      <p:pic>
+        <p:nvPicPr>
+          <p:cNvPr id="5" name="Picture 4">
+            <a:extLst>
+              <a:ext uri="{FF2B5EF4-FFF2-40B4-BE49-F238E27FC236}">
+                <a16:creationId xmlns:a16="http://schemas.microsoft.com/office/drawing/2014/main" id="{E9FE3486-63EA-2207-E000-E643D9893FB3}"/>
+              </a:ext>
+            </a:extLst>
+          </p:cNvPr>
+          <p:cNvPicPr>
+            <a:picLocks noChangeAspect="1"/>
+          </p:cNvPicPr>
+          <p:nvPr/>
+        </p:nvPicPr>
+        <p:blipFill>
+          <a:blip r:embed="rId2"/>
+          <a:srcRect r="3982"/>
+          <a:stretch>
+            <a:fillRect/>
+          </a:stretch>
+        </p:blipFill>
+        <p:spPr>
+          <a:xfrm>
+            <a:off x="20" y="1282"/>
+            <a:ext cx="12191980" cy="6856718"/>
+          </a:xfrm>
+          <a:prstGeom prst="rect">
+            <a:avLst/>
+          </a:prstGeom>
+        </p:spPr>
+      </p:pic>
+    </p:spTree>
+    <p:extLst>
+      <p:ext uri="{BB962C8B-B14F-4D97-AF65-F5344CB8AC3E}">
+        <p14:creationId xmlns:p14="http://schemas.microsoft.com/office/powerpoint/2010/main" val="407505680"/>
+      </p:ext>
+    </p:extLst>
+  </p:cSld>
+  <p:clrMapOvr>
+    <a:masterClrMapping/>
+  </p:clrMapOvr>
+</p:sld>
+</file>
+
+<file path=ppt/slides/slide7.xml><?xml version="1.0" encoding="utf-8"?>
+<p:sld xmlns:a="http://schemas.openxmlformats.org/drawingml/2006/main" xmlns:r="http://schemas.openxmlformats.org/officeDocument/2006/relationships" xmlns:p="http://schemas.openxmlformats.org/presentationml/2006/main">
+  <p:cSld>
+    <p:bg>
+      <p:bgPr>
+        <a:solidFill>
+          <a:schemeClr val="bg1"/>
+        </a:solidFill>
+        <a:effectLst/>
+      </p:bgPr>
+    </p:bg>
+    <p:spTree>
+      <p:nvGrpSpPr>
+        <p:cNvPr id="1" name=""/>
+        <p:cNvGrpSpPr/>
+        <p:nvPr/>
+      </p:nvGrpSpPr>
+      <p:grpSpPr>
+        <a:xfrm>
+          <a:off x="0" y="0"/>
+          <a:ext cx="0" cy="0"/>
+          <a:chOff x="0" y="0"/>
+          <a:chExt cx="0" cy="0"/>
+        </a:xfrm>
+      </p:grpSpPr>
+      <p:sp>
+        <p:nvSpPr>
+          <p:cNvPr id="8" name="Rectangle 7">
+            <a:extLst>
+              <a:ext uri="{FF2B5EF4-FFF2-40B4-BE49-F238E27FC236}">
+                <a16:creationId xmlns:a16="http://schemas.microsoft.com/office/drawing/2014/main" id="{42A4FC2C-047E-45A5-965D-8E1E3BF09BC6}"/>
+              </a:ext>
+              <a:ext uri="{C183D7F6-B498-43B3-948B-1728B52AA6E4}">
+                <adec:decorative xmlns:adec="http://schemas.microsoft.com/office/drawing/2017/decorative" val="1"/>
+              </a:ext>
+            </a:extLst>
+          </p:cNvPr>
+          <p:cNvSpPr>
+            <a:spLocks noGrp="1" noRot="1" noChangeAspect="1" noMove="1" noResize="1" noEditPoints="1" noAdjustHandles="1" noChangeArrowheads="1" noChangeShapeType="1" noTextEdit="1"/>
+          </p:cNvSpPr>
+          <p:nvPr>
+            <p:extLst>
+              <p:ext uri="{386F3935-93C4-4BCD-93E2-E3B085C9AB24}">
+                <p16:designElem xmlns:p16="http://schemas.microsoft.com/office/powerpoint/2015/main" val="1"/>
+              </p:ext>
+            </p:extLst>
+          </p:nvPr>
+        </p:nvSpPr>
+        <p:spPr bwMode="white">
+          <a:xfrm>
+            <a:off x="1524" y="0"/>
+            <a:ext cx="12188952" cy="6858000"/>
+          </a:xfrm>
+          <a:prstGeom prst="rect">
+            <a:avLst/>
+          </a:prstGeom>
+          <a:noFill/>
+          <a:ln>
+            <a:noFill/>
+          </a:ln>
+        </p:spPr>
+        <p:style>
+          <a:lnRef idx="2">
+            <a:schemeClr val="accent1">
+              <a:shade val="50000"/>
+            </a:schemeClr>
+          </a:lnRef>
+          <a:fillRef idx="1">
+            <a:schemeClr val="accent1"/>
+          </a:fillRef>
+          <a:effectRef idx="0">
+            <a:schemeClr val="accent1"/>
+          </a:effectRef>
+          <a:fontRef idx="minor">
+            <a:schemeClr val="lt1"/>
+          </a:fontRef>
+        </p:style>
+        <p:txBody>
+          <a:bodyPr rtlCol="0" anchor="ctr"/>
+          <a:lstStyle>
+            <a:defPPr>
+              <a:defRPr lang="en-US"/>
+            </a:defPPr>
+            <a:lvl1pPr marL="0" algn="l" defTabSz="914400" rtl="0" eaLnBrk="1" latinLnBrk="0" hangingPunct="1">
+              <a:defRPr sz="1800" kern="1200">
+                <a:solidFill>
+                  <a:schemeClr val="lt1"/>
+                </a:solidFill>
+                <a:latin typeface="+mn-lt"/>
+                <a:ea typeface="+mn-ea"/>
+                <a:cs typeface="+mn-cs"/>
+              </a:defRPr>
+            </a:lvl1pPr>
+            <a:lvl2pPr marL="457200" algn="l" defTabSz="914400" rtl="0" eaLnBrk="1" latinLnBrk="0" hangingPunct="1">
+              <a:defRPr sz="1800" kern="1200">
+                <a:solidFill>
+                  <a:schemeClr val="lt1"/>
+                </a:solidFill>
+                <a:latin typeface="+mn-lt"/>
+                <a:ea typeface="+mn-ea"/>
+                <a:cs typeface="+mn-cs"/>
+              </a:defRPr>
+            </a:lvl2pPr>
+            <a:lvl3pPr marL="914400" algn="l" defTabSz="914400" rtl="0" eaLnBrk="1" latinLnBrk="0" hangingPunct="1">
+              <a:defRPr sz="1800" kern="1200">
+                <a:solidFill>
+                  <a:schemeClr val="lt1"/>
+                </a:solidFill>
+                <a:latin typeface="+mn-lt"/>
+                <a:ea typeface="+mn-ea"/>
+                <a:cs typeface="+mn-cs"/>
+              </a:defRPr>
+            </a:lvl3pPr>
+            <a:lvl4pPr marL="1371600" algn="l" defTabSz="914400" rtl="0" eaLnBrk="1" latinLnBrk="0" hangingPunct="1">
+              <a:defRPr sz="1800" kern="1200">
+                <a:solidFill>
+                  <a:schemeClr val="lt1"/>
+                </a:solidFill>
+                <a:latin typeface="+mn-lt"/>
+                <a:ea typeface="+mn-ea"/>
+                <a:cs typeface="+mn-cs"/>
+              </a:defRPr>
+            </a:lvl4pPr>
+            <a:lvl5pPr marL="1828800" algn="l" defTabSz="914400" rtl="0" eaLnBrk="1" latinLnBrk="0" hangingPunct="1">
+              <a:defRPr sz="1800" kern="1200">
+                <a:solidFill>
+                  <a:schemeClr val="lt1"/>
+                </a:solidFill>
+                <a:latin typeface="+mn-lt"/>
+                <a:ea typeface="+mn-ea"/>
+                <a:cs typeface="+mn-cs"/>
+              </a:defRPr>
+            </a:lvl5pPr>
+            <a:lvl6pPr marL="2286000" algn="l" defTabSz="914400" rtl="0" eaLnBrk="1" latinLnBrk="0" hangingPunct="1">
+              <a:defRPr sz="1800" kern="1200">
+                <a:solidFill>
+                  <a:schemeClr val="lt1"/>
+                </a:solidFill>
+                <a:latin typeface="+mn-lt"/>
+                <a:ea typeface="+mn-ea"/>
+                <a:cs typeface="+mn-cs"/>
+              </a:defRPr>
+            </a:lvl6pPr>
+            <a:lvl7pPr marL="2743200" algn="l" defTabSz="914400" rtl="0" eaLnBrk="1" latinLnBrk="0" hangingPunct="1">
+              <a:defRPr sz="1800" kern="1200">
+                <a:solidFill>
+                  <a:schemeClr val="lt1"/>
+                </a:solidFill>
+                <a:latin typeface="+mn-lt"/>
+                <a:ea typeface="+mn-ea"/>
+                <a:cs typeface="+mn-cs"/>
+              </a:defRPr>
+            </a:lvl7pPr>
+            <a:lvl8pPr marL="3200400" algn="l" defTabSz="914400" rtl="0" eaLnBrk="1" latinLnBrk="0" hangingPunct="1">
+              <a:defRPr sz="1800" kern="1200">
+                <a:solidFill>
+                  <a:schemeClr val="lt1"/>
+                </a:solidFill>
+                <a:latin typeface="+mn-lt"/>
+                <a:ea typeface="+mn-ea"/>
+                <a:cs typeface="+mn-cs"/>
+              </a:defRPr>
+            </a:lvl8pPr>
+            <a:lvl9pPr marL="3657600" algn="l" defTabSz="914400" rtl="0" eaLnBrk="1" latinLnBrk="0" hangingPunct="1">
+              <a:defRPr sz="1800" kern="1200">
+                <a:solidFill>
+                  <a:schemeClr val="lt1"/>
+                </a:solidFill>
+                <a:latin typeface="+mn-lt"/>
+                <a:ea typeface="+mn-ea"/>
+                <a:cs typeface="+mn-cs"/>
+              </a:defRPr>
+            </a:lvl9pPr>
+          </a:lstStyle>
+          <a:p>
+            <a:pPr algn="ctr"/>
+            <a:endParaRPr lang="en-US"/>
+          </a:p>
+        </p:txBody>
+      </p:sp>
+      <p:pic>
+        <p:nvPicPr>
+          <p:cNvPr id="3" name="Picture 2">
+            <a:extLst>
+              <a:ext uri="{FF2B5EF4-FFF2-40B4-BE49-F238E27FC236}">
+                <a16:creationId xmlns:a16="http://schemas.microsoft.com/office/drawing/2014/main" id="{7F9E3095-3450-E88B-CC58-34B8AC6F22C8}"/>
+              </a:ext>
+            </a:extLst>
+          </p:cNvPr>
+          <p:cNvPicPr>
+            <a:picLocks noChangeAspect="1"/>
+          </p:cNvPicPr>
+          <p:nvPr/>
+        </p:nvPicPr>
+        <p:blipFill>
+          <a:blip r:embed="rId2"/>
+          <a:srcRect r="872" b="1"/>
+          <a:stretch>
+            <a:fillRect/>
+          </a:stretch>
+        </p:blipFill>
+        <p:spPr>
+          <a:xfrm>
+            <a:off x="20" y="1282"/>
+            <a:ext cx="12191980" cy="6856718"/>
+          </a:xfrm>
+          <a:prstGeom prst="rect">
+            <a:avLst/>
+          </a:prstGeom>
+        </p:spPr>
+      </p:pic>
+    </p:spTree>
+    <p:extLst>
+      <p:ext uri="{BB962C8B-B14F-4D97-AF65-F5344CB8AC3E}">
+        <p14:creationId xmlns:p14="http://schemas.microsoft.com/office/powerpoint/2010/main" val="1009546106"/>
+      </p:ext>
+    </p:extLst>
+  </p:cSld>
+  <p:clrMapOvr>
+    <a:masterClrMapping/>
+  </p:clrMapOvr>
+</p:sld>
+</file>
+
+<file path=ppt/slides/slide8.xml><?xml version="1.0" encoding="utf-8"?>
+<p:sld xmlns:a="http://schemas.openxmlformats.org/drawingml/2006/main" xmlns:r="http://schemas.openxmlformats.org/officeDocument/2006/relationships" xmlns:p="http://schemas.openxmlformats.org/presentationml/2006/main">
+  <p:cSld>
+    <p:bg>
+      <p:bgPr>
+        <a:solidFill>
+          <a:schemeClr val="bg1"/>
+        </a:solidFill>
+        <a:effectLst/>
+      </p:bgPr>
+    </p:bg>
+    <p:spTree>
+      <p:nvGrpSpPr>
+        <p:cNvPr id="1" name=""/>
+        <p:cNvGrpSpPr/>
+        <p:nvPr/>
+      </p:nvGrpSpPr>
+      <p:grpSpPr>
+        <a:xfrm>
+          <a:off x="0" y="0"/>
+          <a:ext cx="0" cy="0"/>
+          <a:chOff x="0" y="0"/>
+          <a:chExt cx="0" cy="0"/>
+        </a:xfrm>
+      </p:grpSpPr>
+      <p:sp>
+        <p:nvSpPr>
+          <p:cNvPr id="7" name="Rectangle 6">
+            <a:extLst>
+              <a:ext uri="{FF2B5EF4-FFF2-40B4-BE49-F238E27FC236}">
+                <a16:creationId xmlns:a16="http://schemas.microsoft.com/office/drawing/2014/main" id="{42A4FC2C-047E-45A5-965D-8E1E3BF09BC6}"/>
+              </a:ext>
+              <a:ext uri="{C183D7F6-B498-43B3-948B-1728B52AA6E4}">
+                <adec:decorative xmlns:adec="http://schemas.microsoft.com/office/drawing/2017/decorative" val="1"/>
+              </a:ext>
+            </a:extLst>
+          </p:cNvPr>
+          <p:cNvSpPr>
+            <a:spLocks noGrp="1" noRot="1" noChangeAspect="1" noMove="1" noResize="1" noEditPoints="1" noAdjustHandles="1" noChangeArrowheads="1" noChangeShapeType="1" noTextEdit="1"/>
+          </p:cNvSpPr>
+          <p:nvPr>
+            <p:extLst>
+              <p:ext uri="{386F3935-93C4-4BCD-93E2-E3B085C9AB24}">
+                <p16:designElem xmlns:p16="http://schemas.microsoft.com/office/powerpoint/2015/main" val="1"/>
+              </p:ext>
+            </p:extLst>
+          </p:nvPr>
+        </p:nvSpPr>
+        <p:spPr bwMode="white">
+          <a:xfrm>
+            <a:off x="1524" y="0"/>
+            <a:ext cx="12188952" cy="6858000"/>
+          </a:xfrm>
+          <a:prstGeom prst="rect">
+            <a:avLst/>
+          </a:prstGeom>
+          <a:noFill/>
+          <a:ln>
+            <a:noFill/>
+          </a:ln>
+        </p:spPr>
+        <p:style>
+          <a:lnRef idx="2">
+            <a:schemeClr val="accent1">
+              <a:shade val="50000"/>
+            </a:schemeClr>
+          </a:lnRef>
+          <a:fillRef idx="1">
+            <a:schemeClr val="accent1"/>
+          </a:fillRef>
+          <a:effectRef idx="0">
+            <a:schemeClr val="accent1"/>
+          </a:effectRef>
+          <a:fontRef idx="minor">
+            <a:schemeClr val="lt1"/>
+          </a:fontRef>
+        </p:style>
+        <p:txBody>
+          <a:bodyPr rtlCol="0" anchor="ctr"/>
+          <a:lstStyle>
+            <a:defPPr>
+              <a:defRPr lang="en-US"/>
+            </a:defPPr>
+            <a:lvl1pPr marL="0" algn="l" defTabSz="914400" rtl="0" eaLnBrk="1" latinLnBrk="0" hangingPunct="1">
+              <a:defRPr sz="1800" kern="1200">
+                <a:solidFill>
+                  <a:schemeClr val="lt1"/>
+                </a:solidFill>
+                <a:latin typeface="+mn-lt"/>
+                <a:ea typeface="+mn-ea"/>
+                <a:cs typeface="+mn-cs"/>
+              </a:defRPr>
+            </a:lvl1pPr>
+            <a:lvl2pPr marL="457200" algn="l" defTabSz="914400" rtl="0" eaLnBrk="1" latinLnBrk="0" hangingPunct="1">
+              <a:defRPr sz="1800" kern="1200">
+                <a:solidFill>
+                  <a:schemeClr val="lt1"/>
+                </a:solidFill>
+                <a:latin typeface="+mn-lt"/>
+                <a:ea typeface="+mn-ea"/>
+                <a:cs typeface="+mn-cs"/>
+              </a:defRPr>
+            </a:lvl2pPr>
+            <a:lvl3pPr marL="914400" algn="l" defTabSz="914400" rtl="0" eaLnBrk="1" latinLnBrk="0" hangingPunct="1">
+              <a:defRPr sz="1800" kern="1200">
+                <a:solidFill>
+                  <a:schemeClr val="lt1"/>
+                </a:solidFill>
+                <a:latin typeface="+mn-lt"/>
+                <a:ea typeface="+mn-ea"/>
+                <a:cs typeface="+mn-cs"/>
+              </a:defRPr>
+            </a:lvl3pPr>
+            <a:lvl4pPr marL="1371600" algn="l" defTabSz="914400" rtl="0" eaLnBrk="1" latinLnBrk="0" hangingPunct="1">
+              <a:defRPr sz="1800" kern="1200">
+                <a:solidFill>
+                  <a:schemeClr val="lt1"/>
+                </a:solidFill>
+                <a:latin typeface="+mn-lt"/>
+                <a:ea typeface="+mn-ea"/>
+                <a:cs typeface="+mn-cs"/>
+              </a:defRPr>
+            </a:lvl4pPr>
+            <a:lvl5pPr marL="1828800" algn="l" defTabSz="914400" rtl="0" eaLnBrk="1" latinLnBrk="0" hangingPunct="1">
+              <a:defRPr sz="1800" kern="1200">
+                <a:solidFill>
+                  <a:schemeClr val="lt1"/>
+                </a:solidFill>
+                <a:latin typeface="+mn-lt"/>
+                <a:ea typeface="+mn-ea"/>
+                <a:cs typeface="+mn-cs"/>
+              </a:defRPr>
+            </a:lvl5pPr>
+            <a:lvl6pPr marL="2286000" algn="l" defTabSz="914400" rtl="0" eaLnBrk="1" latinLnBrk="0" hangingPunct="1">
+              <a:defRPr sz="1800" kern="1200">
+                <a:solidFill>
+                  <a:schemeClr val="lt1"/>
+                </a:solidFill>
+                <a:latin typeface="+mn-lt"/>
+                <a:ea typeface="+mn-ea"/>
+                <a:cs typeface="+mn-cs"/>
+              </a:defRPr>
+            </a:lvl6pPr>
+            <a:lvl7pPr marL="2743200" algn="l" defTabSz="914400" rtl="0" eaLnBrk="1" latinLnBrk="0" hangingPunct="1">
+              <a:defRPr sz="1800" kern="1200">
+                <a:solidFill>
+                  <a:schemeClr val="lt1"/>
+                </a:solidFill>
+                <a:latin typeface="+mn-lt"/>
+                <a:ea typeface="+mn-ea"/>
+                <a:cs typeface="+mn-cs"/>
+              </a:defRPr>
+            </a:lvl7pPr>
+            <a:lvl8pPr marL="3200400" algn="l" defTabSz="914400" rtl="0" eaLnBrk="1" latinLnBrk="0" hangingPunct="1">
+              <a:defRPr sz="1800" kern="1200">
+                <a:solidFill>
+                  <a:schemeClr val="lt1"/>
+                </a:solidFill>
+                <a:latin typeface="+mn-lt"/>
+                <a:ea typeface="+mn-ea"/>
+                <a:cs typeface="+mn-cs"/>
+              </a:defRPr>
+            </a:lvl8pPr>
+            <a:lvl9pPr marL="3657600" algn="l" defTabSz="914400" rtl="0" eaLnBrk="1" latinLnBrk="0" hangingPunct="1">
+              <a:defRPr sz="1800" kern="1200">
+                <a:solidFill>
+                  <a:schemeClr val="lt1"/>
+                </a:solidFill>
+                <a:latin typeface="+mn-lt"/>
+                <a:ea typeface="+mn-ea"/>
+                <a:cs typeface="+mn-cs"/>
+              </a:defRPr>
+            </a:lvl9pPr>
+          </a:lstStyle>
+          <a:p>
+            <a:pPr algn="ctr"/>
+            <a:endParaRPr lang="en-US"/>
+          </a:p>
+        </p:txBody>
+      </p:sp>
+      <p:pic>
+        <p:nvPicPr>
+          <p:cNvPr id="2" name="Picture 1">
+            <a:extLst>
+              <a:ext uri="{FF2B5EF4-FFF2-40B4-BE49-F238E27FC236}">
+                <a16:creationId xmlns:a16="http://schemas.microsoft.com/office/drawing/2014/main" id="{F51356B6-1CDD-0E1E-DF05-0491C5EDC0ED}"/>
+              </a:ext>
+            </a:extLst>
+          </p:cNvPr>
+          <p:cNvPicPr>
+            <a:picLocks noChangeAspect="1"/>
+          </p:cNvPicPr>
+          <p:nvPr/>
+        </p:nvPicPr>
+        <p:blipFill>
+          <a:blip r:embed="rId2"/>
+          <a:srcRect b="461"/>
+          <a:stretch>
+            <a:fillRect/>
+          </a:stretch>
+        </p:blipFill>
+        <p:spPr>
+          <a:xfrm>
+            <a:off x="20" y="1282"/>
+            <a:ext cx="12191980" cy="6856718"/>
+          </a:xfrm>
+          <a:prstGeom prst="rect">
+            <a:avLst/>
+          </a:prstGeom>
+        </p:spPr>
+      </p:pic>
+    </p:spTree>
+    <p:extLst>
+      <p:ext uri="{BB962C8B-B14F-4D97-AF65-F5344CB8AC3E}">
+        <p14:creationId xmlns:p14="http://schemas.microsoft.com/office/powerpoint/2010/main" val="426749373"/>
+      </p:ext>
+    </p:extLst>
+  </p:cSld>
+  <p:clrMapOvr>
+    <a:masterClrMapping/>
+  </p:clrMapOvr>
+</p:sld>
+</file>
+
+<file path=ppt/slides/slide9.xml><?xml version="1.0" encoding="utf-8"?>
+<p:sld xmlns:a="http://schemas.openxmlformats.org/drawingml/2006/main" xmlns:r="http://schemas.openxmlformats.org/officeDocument/2006/relationships" xmlns:p="http://schemas.openxmlformats.org/presentationml/2006/main">
+  <p:cSld>
+    <p:bg>
+      <p:bgPr>
+        <a:solidFill>
+          <a:schemeClr val="bg1"/>
+        </a:solidFill>
+        <a:effectLst/>
+      </p:bgPr>
+    </p:bg>
+    <p:spTree>
+      <p:nvGrpSpPr>
+        <p:cNvPr id="1" name=""/>
+        <p:cNvGrpSpPr/>
+        <p:nvPr/>
+      </p:nvGrpSpPr>
+      <p:grpSpPr>
+        <a:xfrm>
+          <a:off x="0" y="0"/>
+          <a:ext cx="0" cy="0"/>
+          <a:chOff x="0" y="0"/>
+          <a:chExt cx="0" cy="0"/>
+        </a:xfrm>
+      </p:grpSpPr>
+      <p:sp>
+        <p:nvSpPr>
+          <p:cNvPr id="7" name="Rectangle 6">
+            <a:extLst>
+              <a:ext uri="{FF2B5EF4-FFF2-40B4-BE49-F238E27FC236}">
+                <a16:creationId xmlns:a16="http://schemas.microsoft.com/office/drawing/2014/main" id="{42A4FC2C-047E-45A5-965D-8E1E3BF09BC6}"/>
+              </a:ext>
+              <a:ext uri="{C183D7F6-B498-43B3-948B-1728B52AA6E4}">
+                <adec:decorative xmlns:adec="http://schemas.microsoft.com/office/drawing/2017/decorative" val="1"/>
+              </a:ext>
+            </a:extLst>
+          </p:cNvPr>
+          <p:cNvSpPr>
+            <a:spLocks noGrp="1" noRot="1" noChangeAspect="1" noMove="1" noResize="1" noEditPoints="1" noAdjustHandles="1" noChangeArrowheads="1" noChangeShapeType="1" noTextEdit="1"/>
+          </p:cNvSpPr>
+          <p:nvPr>
+            <p:extLst>
+              <p:ext uri="{386F3935-93C4-4BCD-93E2-E3B085C9AB24}">
+                <p16:designElem xmlns:p16="http://schemas.microsoft.com/office/powerpoint/2015/main" val="1"/>
+              </p:ext>
+            </p:extLst>
+          </p:nvPr>
+        </p:nvSpPr>
+        <p:spPr bwMode="white">
+          <a:xfrm>
+            <a:off x="1524" y="0"/>
+            <a:ext cx="12188952" cy="6858000"/>
+          </a:xfrm>
+          <a:prstGeom prst="rect">
+            <a:avLst/>
+          </a:prstGeom>
+          <a:noFill/>
+          <a:ln>
+            <a:noFill/>
+          </a:ln>
+        </p:spPr>
+        <p:style>
+          <a:lnRef idx="2">
+            <a:schemeClr val="accent1">
+              <a:shade val="50000"/>
+            </a:schemeClr>
+          </a:lnRef>
+          <a:fillRef idx="1">
+            <a:schemeClr val="accent1"/>
+          </a:fillRef>
+          <a:effectRef idx="0">
+            <a:schemeClr val="accent1"/>
+          </a:effectRef>
+          <a:fontRef idx="minor">
+            <a:schemeClr val="lt1"/>
+          </a:fontRef>
+        </p:style>
+        <p:txBody>
+          <a:bodyPr rtlCol="0" anchor="ctr"/>
+          <a:lstStyle>
+            <a:defPPr>
+              <a:defRPr lang="en-US"/>
+            </a:defPPr>
+            <a:lvl1pPr marL="0" algn="l" defTabSz="914400" rtl="0" eaLnBrk="1" latinLnBrk="0" hangingPunct="1">
+              <a:defRPr sz="1800" kern="1200">
+                <a:solidFill>
+                  <a:schemeClr val="lt1"/>
+                </a:solidFill>
+                <a:latin typeface="+mn-lt"/>
+                <a:ea typeface="+mn-ea"/>
+                <a:cs typeface="+mn-cs"/>
+              </a:defRPr>
+            </a:lvl1pPr>
+            <a:lvl2pPr marL="457200" algn="l" defTabSz="914400" rtl="0" eaLnBrk="1" latinLnBrk="0" hangingPunct="1">
+              <a:defRPr sz="1800" kern="1200">
+                <a:solidFill>
+                  <a:schemeClr val="lt1"/>
+                </a:solidFill>
+                <a:latin typeface="+mn-lt"/>
+                <a:ea typeface="+mn-ea"/>
+                <a:cs typeface="+mn-cs"/>
+              </a:defRPr>
+            </a:lvl2pPr>
+            <a:lvl3pPr marL="914400" algn="l" defTabSz="914400" rtl="0" eaLnBrk="1" latinLnBrk="0" hangingPunct="1">
+              <a:defRPr sz="1800" kern="1200">
+                <a:solidFill>
+                  <a:schemeClr val="lt1"/>
+                </a:solidFill>
+                <a:latin typeface="+mn-lt"/>
+                <a:ea typeface="+mn-ea"/>
+                <a:cs typeface="+mn-cs"/>
+              </a:defRPr>
+            </a:lvl3pPr>
+            <a:lvl4pPr marL="1371600" algn="l" defTabSz="914400" rtl="0" eaLnBrk="1" latinLnBrk="0" hangingPunct="1">
+              <a:defRPr sz="1800" kern="1200">
+                <a:solidFill>
+                  <a:schemeClr val="lt1"/>
+                </a:solidFill>
+                <a:latin typeface="+mn-lt"/>
+                <a:ea typeface="+mn-ea"/>
+                <a:cs typeface="+mn-cs"/>
+              </a:defRPr>
+            </a:lvl4pPr>
+            <a:lvl5pPr marL="1828800" algn="l" defTabSz="914400" rtl="0" eaLnBrk="1" latinLnBrk="0" hangingPunct="1">
+              <a:defRPr sz="1800" kern="1200">
+                <a:solidFill>
+                  <a:schemeClr val="lt1"/>
+                </a:solidFill>
+                <a:latin typeface="+mn-lt"/>
+                <a:ea typeface="+mn-ea"/>
+                <a:cs typeface="+mn-cs"/>
+              </a:defRPr>
+            </a:lvl5pPr>
+            <a:lvl6pPr marL="2286000" algn="l" defTabSz="914400" rtl="0" eaLnBrk="1" latinLnBrk="0" hangingPunct="1">
+              <a:defRPr sz="1800" kern="1200">
+                <a:solidFill>
+                  <a:schemeClr val="lt1"/>
+                </a:solidFill>
+                <a:latin typeface="+mn-lt"/>
+                <a:ea typeface="+mn-ea"/>
+                <a:cs typeface="+mn-cs"/>
+              </a:defRPr>
+            </a:lvl6pPr>
+            <a:lvl7pPr marL="2743200" algn="l" defTabSz="914400" rtl="0" eaLnBrk="1" latinLnBrk="0" hangingPunct="1">
+              <a:defRPr sz="1800" kern="1200">
+                <a:solidFill>
+                  <a:schemeClr val="lt1"/>
+                </a:solidFill>
+                <a:latin typeface="+mn-lt"/>
+                <a:ea typeface="+mn-ea"/>
+                <a:cs typeface="+mn-cs"/>
+              </a:defRPr>
+            </a:lvl7pPr>
+            <a:lvl8pPr marL="3200400" algn="l" defTabSz="914400" rtl="0" eaLnBrk="1" latinLnBrk="0" hangingPunct="1">
+              <a:defRPr sz="1800" kern="1200">
+                <a:solidFill>
+                  <a:schemeClr val="lt1"/>
+                </a:solidFill>
+                <a:latin typeface="+mn-lt"/>
+                <a:ea typeface="+mn-ea"/>
+                <a:cs typeface="+mn-cs"/>
+              </a:defRPr>
+            </a:lvl8pPr>
+            <a:lvl9pPr marL="3657600" algn="l" defTabSz="914400" rtl="0" eaLnBrk="1" latinLnBrk="0" hangingPunct="1">
+              <a:defRPr sz="1800" kern="1200">
+                <a:solidFill>
+                  <a:schemeClr val="lt1"/>
+                </a:solidFill>
+                <a:latin typeface="+mn-lt"/>
+                <a:ea typeface="+mn-ea"/>
+                <a:cs typeface="+mn-cs"/>
+              </a:defRPr>
+            </a:lvl9pPr>
+          </a:lstStyle>
+          <a:p>
+            <a:pPr algn="ctr"/>
+            <a:endParaRPr lang="en-US"/>
+          </a:p>
+        </p:txBody>
+      </p:sp>
+      <p:pic>
+        <p:nvPicPr>
+          <p:cNvPr id="2" name="Picture 1">
+            <a:extLst>
+              <a:ext uri="{FF2B5EF4-FFF2-40B4-BE49-F238E27FC236}">
+                <a16:creationId xmlns:a16="http://schemas.microsoft.com/office/drawing/2014/main" id="{83A39DF6-D87C-2D72-8C5E-76C167989C33}"/>
+              </a:ext>
+            </a:extLst>
+          </p:cNvPr>
+          <p:cNvPicPr>
+            <a:picLocks noChangeAspect="1"/>
+          </p:cNvPicPr>
+          <p:nvPr/>
+        </p:nvPicPr>
+        <p:blipFill>
+          <a:blip r:embed="rId2"/>
+          <a:srcRect t="461"/>
+          <a:stretch>
+            <a:fillRect/>
+          </a:stretch>
+        </p:blipFill>
+        <p:spPr>
+          <a:xfrm>
+            <a:off x="20" y="1282"/>
+            <a:ext cx="12191980" cy="6856718"/>
+          </a:xfrm>
+          <a:prstGeom prst="rect">
+            <a:avLst/>
+          </a:prstGeom>
+        </p:spPr>
+      </p:pic>
+    </p:spTree>
+    <p:extLst>
+      <p:ext uri="{BB962C8B-B14F-4D97-AF65-F5344CB8AC3E}">
+        <p14:creationId xmlns:p14="http://schemas.microsoft.com/office/powerpoint/2010/main" val="2291869706"/>
+      </p:ext>
+    </p:extLst>
   </p:cSld>
   <p:clrMapOvr>
     <a:masterClrMapping/>
@@ -4161,4 +5028,319 @@
     </a:ext>
   </a:extLst>
 </a:theme>
+</file>
+
+<file path=ppt/theme/theme2.xml><?xml version="1.0" encoding="utf-8"?>
+<a:theme xmlns:a="http://schemas.openxmlformats.org/drawingml/2006/main" name="Office Theme">
+  <a:themeElements>
+    <a:clrScheme name="Office">
+      <a:dk1>
+        <a:sysClr val="windowText" lastClr="000000"/>
+      </a:dk1>
+      <a:lt1>
+        <a:sysClr val="window" lastClr="FFFFFF"/>
+      </a:lt1>
+      <a:dk2>
+        <a:srgbClr val="0E2841"/>
+      </a:dk2>
+      <a:lt2>
+        <a:srgbClr val="E8E8E8"/>
+      </a:lt2>
+      <a:accent1>
+        <a:srgbClr val="156082"/>
+      </a:accent1>
+      <a:accent2>
+        <a:srgbClr val="E97132"/>
+      </a:accent2>
+      <a:accent3>
+        <a:srgbClr val="196B24"/>
+      </a:accent3>
+      <a:accent4>
+        <a:srgbClr val="0F9ED5"/>
+      </a:accent4>
+      <a:accent5>
+        <a:srgbClr val="A02B93"/>
+      </a:accent5>
+      <a:accent6>
+        <a:srgbClr val="4EA72E"/>
+      </a:accent6>
+      <a:hlink>
+        <a:srgbClr val="467886"/>
+      </a:hlink>
+      <a:folHlink>
+        <a:srgbClr val="96607D"/>
+      </a:folHlink>
+    </a:clrScheme>
+    <a:fontScheme name="Office">
+      <a:majorFont>
+        <a:latin typeface="Aptos Display" panose="02110004020202020204"/>
+        <a:ea typeface=""/>
+        <a:cs typeface=""/>
+        <a:font script="Jpan" typeface="游ゴシック Light"/>
+        <a:font script="Hang" typeface="맑은 고딕"/>
+        <a:font script="Hans" typeface="等线 Light"/>
+        <a:font script="Hant" typeface="新細明體"/>
+        <a:font script="Arab" typeface="Times New Roman"/>
+        <a:font script="Hebr" typeface="Times New Roman"/>
+        <a:font script="Thai" typeface="Angsana New"/>
+        <a:font script="Ethi" typeface="Nyala"/>
+        <a:font script="Beng" typeface="Vrinda"/>
+        <a:font script="Gujr" typeface="Shruti"/>
+        <a:font script="Khmr" typeface="MoolBoran"/>
+        <a:font script="Knda" typeface="Tunga"/>
+        <a:font script="Guru" typeface="Raavi"/>
+        <a:font script="Cans" typeface="Euphemia"/>
+        <a:font script="Cher" typeface="Plantagenet Cherokee"/>
+        <a:font script="Yiii" typeface="Microsoft Yi Baiti"/>
+        <a:font script="Tibt" typeface="Microsoft Himalaya"/>
+        <a:font script="Thaa" typeface="MV Boli"/>
+        <a:font script="Deva" typeface="Mangal"/>
+        <a:font script="Telu" typeface="Gautami"/>
+        <a:font script="Taml" typeface="Latha"/>
+        <a:font script="Syrc" typeface="Estrangelo Edessa"/>
+        <a:font script="Orya" typeface="Kalinga"/>
+        <a:font script="Mlym" typeface="Kartika"/>
+        <a:font script="Laoo" typeface="DokChampa"/>
+        <a:font script="Sinh" typeface="Iskoola Pota"/>
+        <a:font script="Mong" typeface="Mongolian Baiti"/>
+        <a:font script="Viet" typeface="Times New Roman"/>
+        <a:font script="Uigh" typeface="Microsoft Uighur"/>
+        <a:font script="Geor" typeface="Sylfaen"/>
+        <a:font script="Armn" typeface="Arial"/>
+        <a:font script="Bugi" typeface="Leelawadee UI"/>
+        <a:font script="Bopo" typeface="Microsoft JhengHei"/>
+        <a:font script="Java" typeface="Javanese Text"/>
+        <a:font script="Lisu" typeface="Segoe UI"/>
+        <a:font script="Mymr" typeface="Myanmar Text"/>
+        <a:font script="Nkoo" typeface="Ebrima"/>
+        <a:font script="Olck" typeface="Nirmala UI"/>
+        <a:font script="Osma" typeface="Ebrima"/>
+        <a:font script="Phag" typeface="Phagspa"/>
+        <a:font script="Syrn" typeface="Estrangelo Edessa"/>
+        <a:font script="Syrj" typeface="Estrangelo Edessa"/>
+        <a:font script="Syre" typeface="Estrangelo Edessa"/>
+        <a:font script="Sora" typeface="Nirmala UI"/>
+        <a:font script="Tale" typeface="Microsoft Tai Le"/>
+        <a:font script="Talu" typeface="Microsoft New Tai Lue"/>
+        <a:font script="Tfng" typeface="Ebrima"/>
+      </a:majorFont>
+      <a:minorFont>
+        <a:latin typeface="Aptos" panose="02110004020202020204"/>
+        <a:ea typeface=""/>
+        <a:cs typeface=""/>
+        <a:font script="Jpan" typeface="游ゴシック"/>
+        <a:font script="Hang" typeface="맑은 고딕"/>
+        <a:font script="Hans" typeface="等线"/>
+        <a:font script="Hant" typeface="新細明體"/>
+        <a:font script="Arab" typeface="Arial"/>
+        <a:font script="Hebr" typeface="Arial"/>
+        <a:font script="Thai" typeface="Cordia New"/>
+        <a:font script="Ethi" typeface="Nyala"/>
+        <a:font script="Beng" typeface="Vrinda"/>
+        <a:font script="Gujr" typeface="Shruti"/>
+        <a:font script="Khmr" typeface="DaunPenh"/>
+        <a:font script="Knda" typeface="Tunga"/>
+        <a:font script="Guru" typeface="Raavi"/>
+        <a:font script="Cans" typeface="Euphemia"/>
+        <a:font script="Cher" typeface="Plantagenet Cherokee"/>
+        <a:font script="Yiii" typeface="Microsoft Yi Baiti"/>
+        <a:font script="Tibt" typeface="Microsoft Himalaya"/>
+        <a:font script="Thaa" typeface="MV Boli"/>
+        <a:font script="Deva" typeface="Mangal"/>
+        <a:font script="Telu" typeface="Gautami"/>
+        <a:font script="Taml" typeface="Latha"/>
+        <a:font script="Syrc" typeface="Estrangelo Edessa"/>
+        <a:font script="Orya" typeface="Kalinga"/>
+        <a:font script="Mlym" typeface="Kartika"/>
+        <a:font script="Laoo" typeface="DokChampa"/>
+        <a:font script="Sinh" typeface="Iskoola Pota"/>
+        <a:font script="Mong" typeface="Mongolian Baiti"/>
+        <a:font script="Viet" typeface="Arial"/>
+        <a:font script="Uigh" typeface="Microsoft Uighur"/>
+        <a:font script="Geor" typeface="Sylfaen"/>
+        <a:font script="Armn" typeface="Arial"/>
+        <a:font script="Bugi" typeface="Leelawadee UI"/>
+        <a:font script="Bopo" typeface="Microsoft JhengHei"/>
+        <a:font script="Java" typeface="Javanese Text"/>
+        <a:font script="Lisu" typeface="Segoe UI"/>
+        <a:font script="Mymr" typeface="Myanmar Text"/>
+        <a:font script="Nkoo" typeface="Ebrima"/>
+        <a:font script="Olck" typeface="Nirmala UI"/>
+        <a:font script="Osma" typeface="Ebrima"/>
+        <a:font script="Phag" typeface="Phagspa"/>
+        <a:font script="Syrn" typeface="Estrangelo Edessa"/>
+        <a:font script="Syrj" typeface="Estrangelo Edessa"/>
+        <a:font script="Syre" typeface="Estrangelo Edessa"/>
+        <a:font script="Sora" typeface="Nirmala UI"/>
+        <a:font script="Tale" typeface="Microsoft Tai Le"/>
+        <a:font script="Talu" typeface="Microsoft New Tai Lue"/>
+        <a:font script="Tfng" typeface="Ebrima"/>
+      </a:minorFont>
+    </a:fontScheme>
+    <a:fmtScheme name="Office">
+      <a:fillStyleLst>
+        <a:solidFill>
+          <a:schemeClr val="phClr"/>
+        </a:solidFill>
+        <a:gradFill rotWithShape="1">
+          <a:gsLst>
+            <a:gs pos="0">
+              <a:schemeClr val="phClr">
+                <a:lumMod val="110000"/>
+                <a:satMod val="105000"/>
+                <a:tint val="67000"/>
+              </a:schemeClr>
+            </a:gs>
+            <a:gs pos="50000">
+              <a:schemeClr val="phClr">
+                <a:lumMod val="105000"/>
+                <a:satMod val="103000"/>
+                <a:tint val="73000"/>
+              </a:schemeClr>
+            </a:gs>
+            <a:gs pos="100000">
+              <a:schemeClr val="phClr">
+                <a:lumMod val="105000"/>
+                <a:satMod val="109000"/>
+                <a:tint val="81000"/>
+              </a:schemeClr>
+            </a:gs>
+          </a:gsLst>
+          <a:lin ang="5400000" scaled="0"/>
+        </a:gradFill>
+        <a:gradFill rotWithShape="1">
+          <a:gsLst>
+            <a:gs pos="0">
+              <a:schemeClr val="phClr">
+                <a:satMod val="103000"/>
+                <a:lumMod val="102000"/>
+                <a:tint val="94000"/>
+              </a:schemeClr>
+            </a:gs>
+            <a:gs pos="50000">
+              <a:schemeClr val="phClr">
+                <a:satMod val="110000"/>
+                <a:lumMod val="100000"/>
+                <a:shade val="100000"/>
+              </a:schemeClr>
+            </a:gs>
+            <a:gs pos="100000">
+              <a:schemeClr val="phClr">
+                <a:lumMod val="99000"/>
+                <a:satMod val="120000"/>
+                <a:shade val="78000"/>
+              </a:schemeClr>
+            </a:gs>
+          </a:gsLst>
+          <a:lin ang="5400000" scaled="0"/>
+        </a:gradFill>
+      </a:fillStyleLst>
+      <a:lnStyleLst>
+        <a:ln w="12700" cap="flat" cmpd="sng" algn="ctr">
+          <a:solidFill>
+            <a:schemeClr val="phClr"/>
+          </a:solidFill>
+          <a:prstDash val="solid"/>
+          <a:miter lim="800000"/>
+        </a:ln>
+        <a:ln w="19050" cap="flat" cmpd="sng" algn="ctr">
+          <a:solidFill>
+            <a:schemeClr val="phClr"/>
+          </a:solidFill>
+          <a:prstDash val="solid"/>
+          <a:miter lim="800000"/>
+        </a:ln>
+        <a:ln w="25400" cap="flat" cmpd="sng" algn="ctr">
+          <a:solidFill>
+            <a:schemeClr val="phClr"/>
+          </a:solidFill>
+          <a:prstDash val="solid"/>
+          <a:miter lim="800000"/>
+        </a:ln>
+      </a:lnStyleLst>
+      <a:effectStyleLst>
+        <a:effectStyle>
+          <a:effectLst/>
+        </a:effectStyle>
+        <a:effectStyle>
+          <a:effectLst/>
+        </a:effectStyle>
+        <a:effectStyle>
+          <a:effectLst>
+            <a:outerShdw blurRad="57150" dist="19050" dir="5400000" algn="ctr" rotWithShape="0">
+              <a:srgbClr val="000000">
+                <a:alpha val="63000"/>
+              </a:srgbClr>
+            </a:outerShdw>
+          </a:effectLst>
+        </a:effectStyle>
+      </a:effectStyleLst>
+      <a:bgFillStyleLst>
+        <a:solidFill>
+          <a:schemeClr val="phClr"/>
+        </a:solidFill>
+        <a:solidFill>
+          <a:schemeClr val="phClr">
+            <a:tint val="95000"/>
+            <a:satMod val="170000"/>
+          </a:schemeClr>
+        </a:solidFill>
+        <a:gradFill rotWithShape="1">
+          <a:gsLst>
+            <a:gs pos="0">
+              <a:schemeClr val="phClr">
+                <a:tint val="93000"/>
+                <a:satMod val="150000"/>
+                <a:shade val="98000"/>
+                <a:lumMod val="102000"/>
+              </a:schemeClr>
+            </a:gs>
+            <a:gs pos="50000">
+              <a:schemeClr val="phClr">
+                <a:tint val="98000"/>
+                <a:satMod val="130000"/>
+                <a:shade val="90000"/>
+                <a:lumMod val="103000"/>
+              </a:schemeClr>
+            </a:gs>
+            <a:gs pos="100000">
+              <a:schemeClr val="phClr">
+                <a:shade val="63000"/>
+                <a:satMod val="120000"/>
+              </a:schemeClr>
+            </a:gs>
+          </a:gsLst>
+          <a:lin ang="5400000" scaled="0"/>
+        </a:gradFill>
+      </a:bgFillStyleLst>
+    </a:fmtScheme>
+  </a:themeElements>
+  <a:objectDefaults>
+    <a:lnDef>
+      <a:spPr/>
+      <a:bodyPr/>
+      <a:lstStyle/>
+      <a:style>
+        <a:lnRef idx="2">
+          <a:schemeClr val="accent1"/>
+        </a:lnRef>
+        <a:fillRef idx="0">
+          <a:schemeClr val="accent1"/>
+        </a:fillRef>
+        <a:effectRef idx="1">
+          <a:schemeClr val="accent1"/>
+        </a:effectRef>
+        <a:fontRef idx="minor">
+          <a:schemeClr val="tx1"/>
+        </a:fontRef>
+      </a:style>
+    </a:lnDef>
+  </a:objectDefaults>
+  <a:extraClrSchemeLst/>
+  <a:extLst>
+    <a:ext uri="{05A4C25C-085E-4340-85A3-A5531E510DB2}">
+      <thm15:themeFamily xmlns:thm15="http://schemas.microsoft.com/office/thememl/2012/main" name="Office Theme" id="{2E142A2C-CD16-42D6-873A-C26D2A0506FA}" vid="{1BDDFF52-6CD6-40A5-AB3C-68EB2F1E4D0A}"/>
+    </a:ext>
+  </a:extLst>
+</a:theme>
 </file>